--- a/PPTs/L3-Exercises ANS.pptx
+++ b/PPTs/L3-Exercises ANS.pptx
@@ -183,6 +183,118 @@
 </p:presentation>
 </file>
 
+<file path=ppt/changesInfos/changesInfo1.xml><?xml version="1.0" encoding="utf-8"?>
+<pc:chgInfo xmlns:a="http://schemas.openxmlformats.org/drawingml/2006/main" xmlns:r="http://schemas.openxmlformats.org/officeDocument/2006/relationships" xmlns:ac="http://schemas.microsoft.com/office/drawing/2013/main/command" xmlns:pc="http://schemas.microsoft.com/office/powerpoint/2013/main/command">
+  <pc:docChgLst>
+    <pc:chgData name="Zonghua Gu" userId="9a7e1853e1951ef5" providerId="LiveId" clId="{CF1FAA12-072C-4ED5-BA76-0FFFAEFDB88A}"/>
+    <pc:docChg chg="undo custSel modSld">
+      <pc:chgData name="Zonghua Gu" userId="9a7e1853e1951ef5" providerId="LiveId" clId="{CF1FAA12-072C-4ED5-BA76-0FFFAEFDB88A}" dt="2025-09-19T03:56:50.069" v="180" actId="20577"/>
+      <pc:docMkLst>
+        <pc:docMk/>
+      </pc:docMkLst>
+      <pc:sldChg chg="modSp mod">
+        <pc:chgData name="Zonghua Gu" userId="9a7e1853e1951ef5" providerId="LiveId" clId="{CF1FAA12-072C-4ED5-BA76-0FFFAEFDB88A}" dt="2025-09-19T03:56:50.069" v="180" actId="20577"/>
+        <pc:sldMkLst>
+          <pc:docMk/>
+          <pc:sldMk cId="0" sldId="258"/>
+        </pc:sldMkLst>
+        <pc:spChg chg="mod">
+          <ac:chgData name="Zonghua Gu" userId="9a7e1853e1951ef5" providerId="LiveId" clId="{CF1FAA12-072C-4ED5-BA76-0FFFAEFDB88A}" dt="2025-09-19T03:56:50.069" v="180" actId="20577"/>
+          <ac:spMkLst>
+            <pc:docMk/>
+            <pc:sldMk cId="0" sldId="258"/>
+            <ac:spMk id="3" creationId="{00000000-0000-0000-0000-000000000000}"/>
+          </ac:spMkLst>
+        </pc:spChg>
+      </pc:sldChg>
+      <pc:sldChg chg="modSp mod">
+        <pc:chgData name="Zonghua Gu" userId="9a7e1853e1951ef5" providerId="LiveId" clId="{CF1FAA12-072C-4ED5-BA76-0FFFAEFDB88A}" dt="2025-09-19T03:53:12.452" v="115" actId="20577"/>
+        <pc:sldMkLst>
+          <pc:docMk/>
+          <pc:sldMk cId="361725538" sldId="421"/>
+        </pc:sldMkLst>
+        <pc:spChg chg="mod">
+          <ac:chgData name="Zonghua Gu" userId="9a7e1853e1951ef5" providerId="LiveId" clId="{CF1FAA12-072C-4ED5-BA76-0FFFAEFDB88A}" dt="2025-09-19T03:53:12.452" v="115" actId="20577"/>
+          <ac:spMkLst>
+            <pc:docMk/>
+            <pc:sldMk cId="361725538" sldId="421"/>
+            <ac:spMk id="3" creationId="{3B9D0719-335C-D878-3D17-47DE62456CDE}"/>
+          </ac:spMkLst>
+        </pc:spChg>
+      </pc:sldChg>
+      <pc:sldChg chg="modSp mod">
+        <pc:chgData name="Zonghua Gu" userId="9a7e1853e1951ef5" providerId="LiveId" clId="{CF1FAA12-072C-4ED5-BA76-0FFFAEFDB88A}" dt="2025-09-19T03:45:08.172" v="104" actId="207"/>
+        <pc:sldMkLst>
+          <pc:docMk/>
+          <pc:sldMk cId="3860763868" sldId="1389"/>
+        </pc:sldMkLst>
+        <pc:spChg chg="mod">
+          <ac:chgData name="Zonghua Gu" userId="9a7e1853e1951ef5" providerId="LiveId" clId="{CF1FAA12-072C-4ED5-BA76-0FFFAEFDB88A}" dt="2025-09-19T03:45:04.742" v="103" actId="207"/>
+          <ac:spMkLst>
+            <pc:docMk/>
+            <pc:sldMk cId="3860763868" sldId="1389"/>
+            <ac:spMk id="7" creationId="{201F94FF-D7B9-12C1-1694-6E94CAE2A2AE}"/>
+          </ac:spMkLst>
+        </pc:spChg>
+        <pc:spChg chg="mod">
+          <ac:chgData name="Zonghua Gu" userId="9a7e1853e1951ef5" providerId="LiveId" clId="{CF1FAA12-072C-4ED5-BA76-0FFFAEFDB88A}" dt="2025-09-19T03:45:08.172" v="104" actId="207"/>
+          <ac:spMkLst>
+            <pc:docMk/>
+            <pc:sldMk cId="3860763868" sldId="1389"/>
+            <ac:spMk id="8" creationId="{FAEB97AA-2EB9-57C7-B243-3E9A7A4E94C4}"/>
+          </ac:spMkLst>
+        </pc:spChg>
+      </pc:sldChg>
+      <pc:sldChg chg="modSp mod">
+        <pc:chgData name="Zonghua Gu" userId="9a7e1853e1951ef5" providerId="LiveId" clId="{CF1FAA12-072C-4ED5-BA76-0FFFAEFDB88A}" dt="2025-09-19T03:44:26.448" v="102" actId="20577"/>
+        <pc:sldMkLst>
+          <pc:docMk/>
+          <pc:sldMk cId="1863975494" sldId="1394"/>
+        </pc:sldMkLst>
+        <pc:spChg chg="mod">
+          <ac:chgData name="Zonghua Gu" userId="9a7e1853e1951ef5" providerId="LiveId" clId="{CF1FAA12-072C-4ED5-BA76-0FFFAEFDB88A}" dt="2025-09-19T03:44:26.448" v="102" actId="20577"/>
+          <ac:spMkLst>
+            <pc:docMk/>
+            <pc:sldMk cId="1863975494" sldId="1394"/>
+            <ac:spMk id="3" creationId="{AC35D08C-9839-AEF1-FDC4-3484AEF38961}"/>
+          </ac:spMkLst>
+        </pc:spChg>
+      </pc:sldChg>
+      <pc:sldChg chg="modSp mod">
+        <pc:chgData name="Zonghua Gu" userId="9a7e1853e1951ef5" providerId="LiveId" clId="{CF1FAA12-072C-4ED5-BA76-0FFFAEFDB88A}" dt="2025-09-19T03:43:08.314" v="2" actId="20577"/>
+        <pc:sldMkLst>
+          <pc:docMk/>
+          <pc:sldMk cId="2751476572" sldId="1398"/>
+        </pc:sldMkLst>
+        <pc:spChg chg="mod">
+          <ac:chgData name="Zonghua Gu" userId="9a7e1853e1951ef5" providerId="LiveId" clId="{CF1FAA12-072C-4ED5-BA76-0FFFAEFDB88A}" dt="2025-09-19T03:43:08.314" v="2" actId="20577"/>
+          <ac:spMkLst>
+            <pc:docMk/>
+            <pc:sldMk cId="2751476572" sldId="1398"/>
+            <ac:spMk id="3" creationId="{F457968C-088E-2EEC-6B87-D73D14EA4986}"/>
+          </ac:spMkLst>
+        </pc:spChg>
+      </pc:sldChg>
+      <pc:sldChg chg="modSp mod">
+        <pc:chgData name="Zonghua Gu" userId="9a7e1853e1951ef5" providerId="LiveId" clId="{CF1FAA12-072C-4ED5-BA76-0FFFAEFDB88A}" dt="2025-09-19T03:43:13.162" v="5" actId="27636"/>
+        <pc:sldMkLst>
+          <pc:docMk/>
+          <pc:sldMk cId="2109806590" sldId="1399"/>
+        </pc:sldMkLst>
+        <pc:spChg chg="mod">
+          <ac:chgData name="Zonghua Gu" userId="9a7e1853e1951ef5" providerId="LiveId" clId="{CF1FAA12-072C-4ED5-BA76-0FFFAEFDB88A}" dt="2025-09-19T03:43:13.162" v="5" actId="27636"/>
+          <ac:spMkLst>
+            <pc:docMk/>
+            <pc:sldMk cId="2109806590" sldId="1399"/>
+            <ac:spMk id="3" creationId="{5FBECE1E-D532-3178-311A-7FB6223BF292}"/>
+          </ac:spMkLst>
+        </pc:spChg>
+      </pc:sldChg>
+    </pc:docChg>
+  </pc:docChgLst>
+</pc:chgInfo>
+</file>
+
 <file path=ppt/handoutMasters/handoutMaster1.xml><?xml version="1.0" encoding="utf-8"?>
 <p:handoutMaster xmlns:a="http://schemas.openxmlformats.org/drawingml/2006/main" xmlns:r="http://schemas.openxmlformats.org/officeDocument/2006/relationships" xmlns:p="http://schemas.openxmlformats.org/presentationml/2006/main">
   <p:cSld>
@@ -231,14 +343,14 @@
           <a:effectLst/>
           <a:extLst>
             <a:ext uri="{909E8E84-426E-40dd-AFC4-6F175D3DCCD1}">
-              <a14:hiddenFill xmlns="" xmlns:a14="http://schemas.microsoft.com/office/drawing/2010/main">
+              <a14:hiddenFill xmlns:a14="http://schemas.microsoft.com/office/drawing/2010/main" xmlns="">
                 <a:solidFill>
                   <a:schemeClr val="bg1"/>
                 </a:solidFill>
               </a14:hiddenFill>
             </a:ext>
             <a:ext uri="{91240B29-F687-4f45-9708-019B960494DF}">
-              <a14:hiddenLine xmlns="" xmlns:a14="http://schemas.microsoft.com/office/drawing/2010/main" w="12700">
+              <a14:hiddenLine xmlns:a14="http://schemas.microsoft.com/office/drawing/2010/main" xmlns="" w="12700">
                 <a:pattFill prst="narHorz">
                   <a:fgClr>
                     <a:schemeClr val="tx1"/>
@@ -253,7 +365,7 @@
               </a14:hiddenLine>
             </a:ext>
             <a:ext uri="{AF507438-7753-43e0-B8FC-AC1667EBCBE1}">
-              <a14:hiddenEffects xmlns="" xmlns:a14="http://schemas.microsoft.com/office/drawing/2010/main">
+              <a14:hiddenEffects xmlns:a14="http://schemas.microsoft.com/office/drawing/2010/main" xmlns="">
                 <a:effectLst>
                   <a:outerShdw dist="35921" dir="2700000" algn="ctr" rotWithShape="0">
                     <a:schemeClr val="bg2"/>
@@ -359,14 +471,14 @@
           <a:effectLst/>
           <a:extLst>
             <a:ext uri="{909E8E84-426E-40dd-AFC4-6F175D3DCCD1}">
-              <a14:hiddenFill xmlns="" xmlns:a14="http://schemas.microsoft.com/office/drawing/2010/main">
+              <a14:hiddenFill xmlns:a14="http://schemas.microsoft.com/office/drawing/2010/main" xmlns="">
                 <a:solidFill>
                   <a:schemeClr val="bg1"/>
                 </a:solidFill>
               </a14:hiddenFill>
             </a:ext>
             <a:ext uri="{91240B29-F687-4f45-9708-019B960494DF}">
-              <a14:hiddenLine xmlns="" xmlns:a14="http://schemas.microsoft.com/office/drawing/2010/main" w="12700">
+              <a14:hiddenLine xmlns:a14="http://schemas.microsoft.com/office/drawing/2010/main" xmlns="" w="12700">
                 <a:pattFill prst="narHorz">
                   <a:fgClr>
                     <a:schemeClr val="tx1"/>
@@ -381,7 +493,7 @@
               </a14:hiddenLine>
             </a:ext>
             <a:ext uri="{AF507438-7753-43e0-B8FC-AC1667EBCBE1}">
-              <a14:hiddenEffects xmlns="" xmlns:a14="http://schemas.microsoft.com/office/drawing/2010/main">
+              <a14:hiddenEffects xmlns:a14="http://schemas.microsoft.com/office/drawing/2010/main" xmlns="">
                 <a:effectLst>
                   <a:outerShdw dist="35921" dir="2700000" algn="ctr" rotWithShape="0">
                     <a:schemeClr val="bg2"/>
@@ -449,17 +561,17 @@
           <a:effectLst/>
           <a:extLst>
             <a:ext uri="{FAA26D3D-D897-4be2-8F04-BA451C77F1D7}">
-              <ma14:placeholderFlag xmlns="" xmlns:ma14="http://schemas.microsoft.com/office/mac/drawingml/2011/main" val="1"/>
+              <ma14:placeholderFlag xmlns:ma14="http://schemas.microsoft.com/office/mac/drawingml/2011/main" xmlns="" val="1"/>
             </a:ext>
             <a:ext uri="{909E8E84-426E-40dd-AFC4-6F175D3DCCD1}">
-              <a14:hiddenFill xmlns="" xmlns:a14="http://schemas.microsoft.com/office/drawing/2010/main">
+              <a14:hiddenFill xmlns:a14="http://schemas.microsoft.com/office/drawing/2010/main" xmlns="">
                 <a:solidFill>
                   <a:srgbClr val="FFFFFF"/>
                 </a:solidFill>
               </a14:hiddenFill>
             </a:ext>
             <a:ext uri="{AF507438-7753-43e0-B8FC-AC1667EBCBE1}">
-              <a14:hiddenEffects xmlns="" xmlns:a14="http://schemas.microsoft.com/office/drawing/2010/main">
+              <a14:hiddenEffects xmlns:a14="http://schemas.microsoft.com/office/drawing/2010/main" xmlns="">
                 <a:effectLst>
                   <a:outerShdw blurRad="63500" dist="38099" dir="2700000" algn="ctr" rotWithShape="0">
                     <a:srgbClr val="000000">
@@ -470,7 +582,7 @@
               </a14:hiddenEffects>
             </a:ext>
             <a:ext uri="{53640926-AAD7-44d8-BBD7-CCE9431645EC}">
-              <a14:shadowObscured xmlns="" xmlns:a14="http://schemas.microsoft.com/office/drawing/2010/main" val="1"/>
+              <a14:shadowObscured xmlns:a14="http://schemas.microsoft.com/office/drawing/2010/main" xmlns="" val="1"/>
             </a:ext>
           </a:extLst>
         </p:spPr>
@@ -500,14 +612,14 @@
           <a:effectLst/>
           <a:extLst>
             <a:ext uri="{909E8E84-426E-40dd-AFC4-6F175D3DCCD1}">
-              <a14:hiddenFill xmlns="" xmlns:a14="http://schemas.microsoft.com/office/drawing/2010/main">
+              <a14:hiddenFill xmlns:a14="http://schemas.microsoft.com/office/drawing/2010/main" xmlns="">
                 <a:solidFill>
                   <a:schemeClr val="bg1"/>
                 </a:solidFill>
               </a14:hiddenFill>
             </a:ext>
             <a:ext uri="{91240B29-F687-4f45-9708-019B960494DF}">
-              <a14:hiddenLine xmlns="" xmlns:a14="http://schemas.microsoft.com/office/drawing/2010/main" w="12700">
+              <a14:hiddenLine xmlns:a14="http://schemas.microsoft.com/office/drawing/2010/main" xmlns="" w="12700">
                 <a:pattFill prst="narHorz">
                   <a:fgClr>
                     <a:schemeClr val="tx1"/>
@@ -522,7 +634,7 @@
               </a14:hiddenLine>
             </a:ext>
             <a:ext uri="{AF507438-7753-43e0-B8FC-AC1667EBCBE1}">
-              <a14:hiddenEffects xmlns="" xmlns:a14="http://schemas.microsoft.com/office/drawing/2010/main">
+              <a14:hiddenEffects xmlns:a14="http://schemas.microsoft.com/office/drawing/2010/main" xmlns="">
                 <a:effectLst>
                   <a:outerShdw dist="35921" dir="2700000" algn="ctr" rotWithShape="0">
                     <a:schemeClr val="bg2"/>
@@ -772,10 +884,10 @@
         <p:spPr>
           <a:extLst>
             <a:ext uri="{FAA26D3D-D897-4be2-8F04-BA451C77F1D7}">
-              <ma14:placeholderFlag xmlns="" xmlns:ma14="http://schemas.microsoft.com/office/mac/drawingml/2011/main" val="1"/>
+              <ma14:placeholderFlag xmlns:ma14="http://schemas.microsoft.com/office/mac/drawingml/2011/main" xmlns="" val="1"/>
             </a:ext>
             <a:ext uri="{AF507438-7753-43e0-B8FC-AC1667EBCBE1}">
-              <a14:hiddenEffects xmlns="" xmlns:a14="http://schemas.microsoft.com/office/drawing/2010/main">
+              <a14:hiddenEffects xmlns:a14="http://schemas.microsoft.com/office/drawing/2010/main" xmlns="">
                 <a:effectLst>
                   <a:outerShdw blurRad="63500" dist="38099" dir="2700000" algn="ctr" rotWithShape="0">
                     <a:schemeClr val="bg2">
@@ -6451,17 +6563,17 @@
           <a:effectLst/>
           <a:extLst>
             <a:ext uri="{FAA26D3D-D897-4be2-8F04-BA451C77F1D7}">
-              <ma14:placeholderFlag xmlns="" xmlns:ma14="http://schemas.microsoft.com/office/mac/drawingml/2011/main" val="1"/>
+              <ma14:placeholderFlag xmlns:ma14="http://schemas.microsoft.com/office/mac/drawingml/2011/main" xmlns="" val="1"/>
             </a:ext>
             <a:ext uri="{909E8E84-426E-40dd-AFC4-6F175D3DCCD1}">
-              <a14:hiddenFill xmlns="" xmlns:a14="http://schemas.microsoft.com/office/drawing/2010/main">
+              <a14:hiddenFill xmlns:a14="http://schemas.microsoft.com/office/drawing/2010/main" xmlns="">
                 <a:solidFill>
                   <a:schemeClr val="bg1"/>
                 </a:solidFill>
               </a14:hiddenFill>
             </a:ext>
             <a:ext uri="{91240B29-F687-4f45-9708-019B960494DF}">
-              <a14:hiddenLine xmlns="" xmlns:a14="http://schemas.microsoft.com/office/drawing/2010/main" w="12700">
+              <a14:hiddenLine xmlns:a14="http://schemas.microsoft.com/office/drawing/2010/main" xmlns="" w="12700">
                 <a:pattFill prst="narHorz">
                   <a:fgClr>
                     <a:schemeClr val="tx1"/>
@@ -6476,7 +6588,7 @@
               </a14:hiddenLine>
             </a:ext>
             <a:ext uri="{AF507438-7753-43e0-B8FC-AC1667EBCBE1}">
-              <a14:hiddenEffects xmlns="" xmlns:a14="http://schemas.microsoft.com/office/drawing/2010/main">
+              <a14:hiddenEffects xmlns:a14="http://schemas.microsoft.com/office/drawing/2010/main" xmlns="">
                 <a:effectLst>
                   <a:outerShdw blurRad="63500" dist="38099" dir="2700000" algn="ctr" rotWithShape="0">
                     <a:schemeClr val="bg2">
@@ -6529,17 +6641,17 @@
           <a:effectLst/>
           <a:extLst>
             <a:ext uri="{FAA26D3D-D897-4be2-8F04-BA451C77F1D7}">
-              <ma14:placeholderFlag xmlns="" xmlns:ma14="http://schemas.microsoft.com/office/mac/drawingml/2011/main" val="1"/>
+              <ma14:placeholderFlag xmlns:ma14="http://schemas.microsoft.com/office/mac/drawingml/2011/main" xmlns="" val="1"/>
             </a:ext>
             <a:ext uri="{909E8E84-426E-40dd-AFC4-6F175D3DCCD1}">
-              <a14:hiddenFill xmlns="" xmlns:a14="http://schemas.microsoft.com/office/drawing/2010/main">
+              <a14:hiddenFill xmlns:a14="http://schemas.microsoft.com/office/drawing/2010/main" xmlns="">
                 <a:solidFill>
                   <a:schemeClr val="bg1"/>
                 </a:solidFill>
               </a14:hiddenFill>
             </a:ext>
             <a:ext uri="{91240B29-F687-4f45-9708-019B960494DF}">
-              <a14:hiddenLine xmlns="" xmlns:a14="http://schemas.microsoft.com/office/drawing/2010/main" w="12700">
+              <a14:hiddenLine xmlns:a14="http://schemas.microsoft.com/office/drawing/2010/main" xmlns="" w="12700">
                 <a:pattFill prst="narHorz">
                   <a:fgClr>
                     <a:schemeClr val="tx1"/>
@@ -6554,7 +6666,7 @@
               </a14:hiddenLine>
             </a:ext>
             <a:ext uri="{AF507438-7753-43e0-B8FC-AC1667EBCBE1}">
-              <a14:hiddenEffects xmlns="" xmlns:a14="http://schemas.microsoft.com/office/drawing/2010/main">
+              <a14:hiddenEffects xmlns:a14="http://schemas.microsoft.com/office/drawing/2010/main" xmlns="">
                 <a:effectLst>
                   <a:outerShdw blurRad="63500" dist="38099" dir="2700000" algn="ctr" rotWithShape="0">
                     <a:schemeClr val="bg2">
@@ -6638,12 +6750,12 @@
           <a:effectLst/>
           <a:extLst>
             <a:ext uri="{909E8E84-426E-40dd-AFC4-6F175D3DCCD1}">
-              <a14:hiddenFill xmlns="" xmlns:a14="http://schemas.microsoft.com/office/drawing/2010/main">
+              <a14:hiddenFill xmlns:a14="http://schemas.microsoft.com/office/drawing/2010/main" xmlns="">
                 <a:noFill/>
               </a14:hiddenFill>
             </a:ext>
             <a:ext uri="{AF507438-7753-43e0-B8FC-AC1667EBCBE1}">
-              <a14:hiddenEffects xmlns="" xmlns:a14="http://schemas.microsoft.com/office/drawing/2010/main">
+              <a14:hiddenEffects xmlns:a14="http://schemas.microsoft.com/office/drawing/2010/main" xmlns="">
                 <a:effectLst>
                   <a:outerShdw blurRad="63500" dist="38099" dir="2700000" algn="ctr" rotWithShape="0">
                     <a:schemeClr val="bg2">
@@ -7620,17 +7732,17 @@
           <a:effectLst/>
           <a:extLst>
             <a:ext uri="{FAA26D3D-D897-4be2-8F04-BA451C77F1D7}">
-              <ma14:placeholderFlag xmlns="" xmlns:ma14="http://schemas.microsoft.com/office/mac/drawingml/2011/main" val="1"/>
+              <ma14:placeholderFlag xmlns:ma14="http://schemas.microsoft.com/office/mac/drawingml/2011/main" xmlns="" val="1"/>
             </a:ext>
             <a:ext uri="{909E8E84-426E-40dd-AFC4-6F175D3DCCD1}">
-              <a14:hiddenFill xmlns="" xmlns:a14="http://schemas.microsoft.com/office/drawing/2010/main">
+              <a14:hiddenFill xmlns:a14="http://schemas.microsoft.com/office/drawing/2010/main" xmlns="">
                 <a:solidFill>
                   <a:schemeClr val="bg1"/>
                 </a:solidFill>
               </a14:hiddenFill>
             </a:ext>
             <a:ext uri="{91240B29-F687-4f45-9708-019B960494DF}">
-              <a14:hiddenLine xmlns="" xmlns:a14="http://schemas.microsoft.com/office/drawing/2010/main" w="12700">
+              <a14:hiddenLine xmlns:a14="http://schemas.microsoft.com/office/drawing/2010/main" xmlns="" w="12700">
                 <a:pattFill prst="narHorz">
                   <a:fgClr>
                     <a:schemeClr val="tx1"/>
@@ -7645,7 +7757,7 @@
               </a14:hiddenLine>
             </a:ext>
             <a:ext uri="{AF507438-7753-43e0-B8FC-AC1667EBCBE1}">
-              <a14:hiddenEffects xmlns="" xmlns:a14="http://schemas.microsoft.com/office/drawing/2010/main">
+              <a14:hiddenEffects xmlns:a14="http://schemas.microsoft.com/office/drawing/2010/main" xmlns="">
                 <a:effectLst>
                   <a:outerShdw blurRad="63500" dist="38099" dir="2700000" algn="ctr" rotWithShape="0">
                     <a:schemeClr val="bg2">
@@ -7973,17 +8085,17 @@
           <a:effectLst/>
           <a:extLst>
             <a:ext uri="{FAA26D3D-D897-4be2-8F04-BA451C77F1D7}">
-              <ma14:placeholderFlag xmlns="" xmlns:ma14="http://schemas.microsoft.com/office/mac/drawingml/2011/main" val="1"/>
+              <ma14:placeholderFlag xmlns:ma14="http://schemas.microsoft.com/office/mac/drawingml/2011/main" xmlns="" val="1"/>
             </a:ext>
             <a:ext uri="{909E8E84-426E-40dd-AFC4-6F175D3DCCD1}">
-              <a14:hiddenFill xmlns="" xmlns:a14="http://schemas.microsoft.com/office/drawing/2010/main">
+              <a14:hiddenFill xmlns:a14="http://schemas.microsoft.com/office/drawing/2010/main" xmlns="">
                 <a:solidFill>
                   <a:schemeClr val="bg1"/>
                 </a:solidFill>
               </a14:hiddenFill>
             </a:ext>
             <a:ext uri="{91240B29-F687-4f45-9708-019B960494DF}">
-              <a14:hiddenLine xmlns="" xmlns:a14="http://schemas.microsoft.com/office/drawing/2010/main" w="12700">
+              <a14:hiddenLine xmlns:a14="http://schemas.microsoft.com/office/drawing/2010/main" xmlns="" w="12700">
                 <a:pattFill prst="narHorz">
                   <a:fgClr>
                     <a:schemeClr val="tx1"/>
@@ -7998,7 +8110,7 @@
               </a14:hiddenLine>
             </a:ext>
             <a:ext uri="{AF507438-7753-43e0-B8FC-AC1667EBCBE1}">
-              <a14:hiddenEffects xmlns="" xmlns:a14="http://schemas.microsoft.com/office/drawing/2010/main">
+              <a14:hiddenEffects xmlns:a14="http://schemas.microsoft.com/office/drawing/2010/main" xmlns="">
                 <a:effectLst>
                   <a:outerShdw blurRad="63500" dist="38099" dir="2700000" algn="ctr" rotWithShape="0">
                     <a:schemeClr val="bg2">
@@ -8324,17 +8436,17 @@
           <a:effectLst/>
           <a:extLst>
             <a:ext uri="{FAA26D3D-D897-4be2-8F04-BA451C77F1D7}">
-              <ma14:placeholderFlag xmlns="" xmlns:ma14="http://schemas.microsoft.com/office/mac/drawingml/2011/main" val="1"/>
+              <ma14:placeholderFlag xmlns:ma14="http://schemas.microsoft.com/office/mac/drawingml/2011/main" xmlns="" val="1"/>
             </a:ext>
             <a:ext uri="{909E8E84-426E-40dd-AFC4-6F175D3DCCD1}">
-              <a14:hiddenFill xmlns="" xmlns:a14="http://schemas.microsoft.com/office/drawing/2010/main">
+              <a14:hiddenFill xmlns:a14="http://schemas.microsoft.com/office/drawing/2010/main" xmlns="">
                 <a:solidFill>
                   <a:schemeClr val="bg1"/>
                 </a:solidFill>
               </a14:hiddenFill>
             </a:ext>
             <a:ext uri="{91240B29-F687-4f45-9708-019B960494DF}">
-              <a14:hiddenLine xmlns="" xmlns:a14="http://schemas.microsoft.com/office/drawing/2010/main" w="12700">
+              <a14:hiddenLine xmlns:a14="http://schemas.microsoft.com/office/drawing/2010/main" xmlns="" w="12700">
                 <a:pattFill prst="narHorz">
                   <a:fgClr>
                     <a:schemeClr val="tx1"/>
@@ -8349,7 +8461,7 @@
               </a14:hiddenLine>
             </a:ext>
             <a:ext uri="{AF507438-7753-43e0-B8FC-AC1667EBCBE1}">
-              <a14:hiddenEffects xmlns="" xmlns:a14="http://schemas.microsoft.com/office/drawing/2010/main">
+              <a14:hiddenEffects xmlns:a14="http://schemas.microsoft.com/office/drawing/2010/main" xmlns="">
                 <a:effectLst>
                   <a:outerShdw blurRad="63500" dist="38099" dir="2700000" algn="ctr" rotWithShape="0">
                     <a:schemeClr val="bg2">
@@ -8682,17 +8794,17 @@
           <a:effectLst/>
           <a:extLst>
             <a:ext uri="{FAA26D3D-D897-4be2-8F04-BA451C77F1D7}">
-              <ma14:placeholderFlag xmlns="" xmlns:ma14="http://schemas.microsoft.com/office/mac/drawingml/2011/main" val="1"/>
+              <ma14:placeholderFlag xmlns:ma14="http://schemas.microsoft.com/office/mac/drawingml/2011/main" xmlns="" val="1"/>
             </a:ext>
             <a:ext uri="{909E8E84-426E-40dd-AFC4-6F175D3DCCD1}">
-              <a14:hiddenFill xmlns="" xmlns:a14="http://schemas.microsoft.com/office/drawing/2010/main">
+              <a14:hiddenFill xmlns:a14="http://schemas.microsoft.com/office/drawing/2010/main" xmlns="">
                 <a:solidFill>
                   <a:schemeClr val="bg1"/>
                 </a:solidFill>
               </a14:hiddenFill>
             </a:ext>
             <a:ext uri="{91240B29-F687-4f45-9708-019B960494DF}">
-              <a14:hiddenLine xmlns="" xmlns:a14="http://schemas.microsoft.com/office/drawing/2010/main" w="12700">
+              <a14:hiddenLine xmlns:a14="http://schemas.microsoft.com/office/drawing/2010/main" xmlns="" w="12700">
                 <a:pattFill prst="narHorz">
                   <a:fgClr>
                     <a:schemeClr val="tx1"/>
@@ -8707,7 +8819,7 @@
               </a14:hiddenLine>
             </a:ext>
             <a:ext uri="{AF507438-7753-43e0-B8FC-AC1667EBCBE1}">
-              <a14:hiddenEffects xmlns="" xmlns:a14="http://schemas.microsoft.com/office/drawing/2010/main">
+              <a14:hiddenEffects xmlns:a14="http://schemas.microsoft.com/office/drawing/2010/main" xmlns="">
                 <a:effectLst>
                   <a:outerShdw blurRad="63500" dist="38099" dir="2700000" algn="ctr" rotWithShape="0">
                     <a:schemeClr val="bg2">
@@ -9035,17 +9147,17 @@
           <a:effectLst/>
           <a:extLst>
             <a:ext uri="{FAA26D3D-D897-4be2-8F04-BA451C77F1D7}">
-              <ma14:placeholderFlag xmlns="" xmlns:ma14="http://schemas.microsoft.com/office/mac/drawingml/2011/main" val="1"/>
+              <ma14:placeholderFlag xmlns:ma14="http://schemas.microsoft.com/office/mac/drawingml/2011/main" xmlns="" val="1"/>
             </a:ext>
             <a:ext uri="{909E8E84-426E-40dd-AFC4-6F175D3DCCD1}">
-              <a14:hiddenFill xmlns="" xmlns:a14="http://schemas.microsoft.com/office/drawing/2010/main">
+              <a14:hiddenFill xmlns:a14="http://schemas.microsoft.com/office/drawing/2010/main" xmlns="">
                 <a:solidFill>
                   <a:schemeClr val="bg1"/>
                 </a:solidFill>
               </a14:hiddenFill>
             </a:ext>
             <a:ext uri="{91240B29-F687-4f45-9708-019B960494DF}">
-              <a14:hiddenLine xmlns="" xmlns:a14="http://schemas.microsoft.com/office/drawing/2010/main" w="12700">
+              <a14:hiddenLine xmlns:a14="http://schemas.microsoft.com/office/drawing/2010/main" xmlns="" w="12700">
                 <a:pattFill prst="narHorz">
                   <a:fgClr>
                     <a:schemeClr val="tx1"/>
@@ -9060,7 +9172,7 @@
               </a14:hiddenLine>
             </a:ext>
             <a:ext uri="{AF507438-7753-43e0-B8FC-AC1667EBCBE1}">
-              <a14:hiddenEffects xmlns="" xmlns:a14="http://schemas.microsoft.com/office/drawing/2010/main">
+              <a14:hiddenEffects xmlns:a14="http://schemas.microsoft.com/office/drawing/2010/main" xmlns="">
                 <a:effectLst>
                   <a:outerShdw blurRad="63500" dist="38099" dir="2700000" algn="ctr" rotWithShape="0">
                     <a:schemeClr val="bg2">
@@ -9386,17 +9498,17 @@
           <a:effectLst/>
           <a:extLst>
             <a:ext uri="{FAA26D3D-D897-4be2-8F04-BA451C77F1D7}">
-              <ma14:placeholderFlag xmlns="" xmlns:ma14="http://schemas.microsoft.com/office/mac/drawingml/2011/main" val="1"/>
+              <ma14:placeholderFlag xmlns:ma14="http://schemas.microsoft.com/office/mac/drawingml/2011/main" xmlns="" val="1"/>
             </a:ext>
             <a:ext uri="{909E8E84-426E-40dd-AFC4-6F175D3DCCD1}">
-              <a14:hiddenFill xmlns="" xmlns:a14="http://schemas.microsoft.com/office/drawing/2010/main">
+              <a14:hiddenFill xmlns:a14="http://schemas.microsoft.com/office/drawing/2010/main" xmlns="">
                 <a:solidFill>
                   <a:schemeClr val="bg1"/>
                 </a:solidFill>
               </a14:hiddenFill>
             </a:ext>
             <a:ext uri="{91240B29-F687-4f45-9708-019B960494DF}">
-              <a14:hiddenLine xmlns="" xmlns:a14="http://schemas.microsoft.com/office/drawing/2010/main" w="12700">
+              <a14:hiddenLine xmlns:a14="http://schemas.microsoft.com/office/drawing/2010/main" xmlns="" w="12700">
                 <a:pattFill prst="narHorz">
                   <a:fgClr>
                     <a:schemeClr val="tx1"/>
@@ -9411,7 +9523,7 @@
               </a14:hiddenLine>
             </a:ext>
             <a:ext uri="{AF507438-7753-43e0-B8FC-AC1667EBCBE1}">
-              <a14:hiddenEffects xmlns="" xmlns:a14="http://schemas.microsoft.com/office/drawing/2010/main">
+              <a14:hiddenEffects xmlns:a14="http://schemas.microsoft.com/office/drawing/2010/main" xmlns="">
                 <a:effectLst>
                   <a:outerShdw blurRad="63500" dist="38099" dir="2700000" algn="ctr" rotWithShape="0">
                     <a:schemeClr val="bg2">
@@ -10532,17 +10644,17 @@
           <a:effectLst/>
           <a:extLst>
             <a:ext uri="{FAA26D3D-D897-4be2-8F04-BA451C77F1D7}">
-              <ma14:placeholderFlag xmlns="" xmlns:ma14="http://schemas.microsoft.com/office/mac/drawingml/2011/main" val="1"/>
+              <ma14:placeholderFlag xmlns:ma14="http://schemas.microsoft.com/office/mac/drawingml/2011/main" xmlns="" val="1"/>
             </a:ext>
             <a:ext uri="{909E8E84-426E-40dd-AFC4-6F175D3DCCD1}">
-              <a14:hiddenFill xmlns="" xmlns:a14="http://schemas.microsoft.com/office/drawing/2010/main">
+              <a14:hiddenFill xmlns:a14="http://schemas.microsoft.com/office/drawing/2010/main" xmlns="">
                 <a:solidFill>
                   <a:schemeClr val="bg1"/>
                 </a:solidFill>
               </a14:hiddenFill>
             </a:ext>
             <a:ext uri="{91240B29-F687-4f45-9708-019B960494DF}">
-              <a14:hiddenLine xmlns="" xmlns:a14="http://schemas.microsoft.com/office/drawing/2010/main" w="12700">
+              <a14:hiddenLine xmlns:a14="http://schemas.microsoft.com/office/drawing/2010/main" xmlns="" w="12700">
                 <a:pattFill prst="narHorz">
                   <a:fgClr>
                     <a:schemeClr val="tx1"/>
@@ -10557,7 +10669,7 @@
               </a14:hiddenLine>
             </a:ext>
             <a:ext uri="{AF507438-7753-43e0-B8FC-AC1667EBCBE1}">
-              <a14:hiddenEffects xmlns="" xmlns:a14="http://schemas.microsoft.com/office/drawing/2010/main">
+              <a14:hiddenEffects xmlns:a14="http://schemas.microsoft.com/office/drawing/2010/main" xmlns="">
                 <a:effectLst>
                   <a:outerShdw blurRad="63500" dist="38099" dir="2700000" algn="ctr" rotWithShape="0">
                     <a:schemeClr val="bg2">
@@ -10884,17 +10996,17 @@
           <a:effectLst/>
           <a:extLst>
             <a:ext uri="{FAA26D3D-D897-4be2-8F04-BA451C77F1D7}">
-              <ma14:placeholderFlag xmlns="" xmlns:ma14="http://schemas.microsoft.com/office/mac/drawingml/2011/main" val="1"/>
+              <ma14:placeholderFlag xmlns:ma14="http://schemas.microsoft.com/office/mac/drawingml/2011/main" xmlns="" val="1"/>
             </a:ext>
             <a:ext uri="{909E8E84-426E-40dd-AFC4-6F175D3DCCD1}">
-              <a14:hiddenFill xmlns="" xmlns:a14="http://schemas.microsoft.com/office/drawing/2010/main">
+              <a14:hiddenFill xmlns:a14="http://schemas.microsoft.com/office/drawing/2010/main" xmlns="">
                 <a:solidFill>
                   <a:schemeClr val="bg1"/>
                 </a:solidFill>
               </a14:hiddenFill>
             </a:ext>
             <a:ext uri="{91240B29-F687-4f45-9708-019B960494DF}">
-              <a14:hiddenLine xmlns="" xmlns:a14="http://schemas.microsoft.com/office/drawing/2010/main" w="12700">
+              <a14:hiddenLine xmlns:a14="http://schemas.microsoft.com/office/drawing/2010/main" xmlns="" w="12700">
                 <a:pattFill prst="narHorz">
                   <a:fgClr>
                     <a:schemeClr val="tx1"/>
@@ -10909,7 +11021,7 @@
               </a14:hiddenLine>
             </a:ext>
             <a:ext uri="{AF507438-7753-43e0-B8FC-AC1667EBCBE1}">
-              <a14:hiddenEffects xmlns="" xmlns:a14="http://schemas.microsoft.com/office/drawing/2010/main">
+              <a14:hiddenEffects xmlns:a14="http://schemas.microsoft.com/office/drawing/2010/main" xmlns="">
                 <a:effectLst>
                   <a:outerShdw blurRad="63500" dist="38099" dir="2700000" algn="ctr" rotWithShape="0">
                     <a:schemeClr val="bg2">
@@ -11248,17 +11360,17 @@
           <a:effectLst/>
           <a:extLst>
             <a:ext uri="{FAA26D3D-D897-4be2-8F04-BA451C77F1D7}">
-              <ma14:placeholderFlag xmlns="" xmlns:ma14="http://schemas.microsoft.com/office/mac/drawingml/2011/main" val="1"/>
+              <ma14:placeholderFlag xmlns:ma14="http://schemas.microsoft.com/office/mac/drawingml/2011/main" xmlns="" val="1"/>
             </a:ext>
             <a:ext uri="{909E8E84-426E-40dd-AFC4-6F175D3DCCD1}">
-              <a14:hiddenFill xmlns="" xmlns:a14="http://schemas.microsoft.com/office/drawing/2010/main">
+              <a14:hiddenFill xmlns:a14="http://schemas.microsoft.com/office/drawing/2010/main" xmlns="">
                 <a:solidFill>
                   <a:schemeClr val="bg1"/>
                 </a:solidFill>
               </a14:hiddenFill>
             </a:ext>
             <a:ext uri="{91240B29-F687-4f45-9708-019B960494DF}">
-              <a14:hiddenLine xmlns="" xmlns:a14="http://schemas.microsoft.com/office/drawing/2010/main" w="12700">
+              <a14:hiddenLine xmlns:a14="http://schemas.microsoft.com/office/drawing/2010/main" xmlns="" w="12700">
                 <a:pattFill prst="narHorz">
                   <a:fgClr>
                     <a:schemeClr val="tx1"/>
@@ -11273,7 +11385,7 @@
               </a14:hiddenLine>
             </a:ext>
             <a:ext uri="{AF507438-7753-43e0-B8FC-AC1667EBCBE1}">
-              <a14:hiddenEffects xmlns="" xmlns:a14="http://schemas.microsoft.com/office/drawing/2010/main">
+              <a14:hiddenEffects xmlns:a14="http://schemas.microsoft.com/office/drawing/2010/main" xmlns="">
                 <a:effectLst>
                   <a:outerShdw blurRad="63500" dist="38099" dir="2700000" algn="ctr" rotWithShape="0">
                     <a:schemeClr val="bg2">
@@ -11549,17 +11661,17 @@
           <a:effectLst/>
           <a:extLst>
             <a:ext uri="{FAA26D3D-D897-4be2-8F04-BA451C77F1D7}">
-              <ma14:placeholderFlag xmlns="" xmlns:ma14="http://schemas.microsoft.com/office/mac/drawingml/2011/main" val="1"/>
+              <ma14:placeholderFlag xmlns:ma14="http://schemas.microsoft.com/office/mac/drawingml/2011/main" xmlns="" val="1"/>
             </a:ext>
             <a:ext uri="{909E8E84-426E-40dd-AFC4-6F175D3DCCD1}">
-              <a14:hiddenFill xmlns="" xmlns:a14="http://schemas.microsoft.com/office/drawing/2010/main">
+              <a14:hiddenFill xmlns:a14="http://schemas.microsoft.com/office/drawing/2010/main" xmlns="">
                 <a:solidFill>
                   <a:schemeClr val="bg1"/>
                 </a:solidFill>
               </a14:hiddenFill>
             </a:ext>
             <a:ext uri="{91240B29-F687-4f45-9708-019B960494DF}">
-              <a14:hiddenLine xmlns="" xmlns:a14="http://schemas.microsoft.com/office/drawing/2010/main" w="12700">
+              <a14:hiddenLine xmlns:a14="http://schemas.microsoft.com/office/drawing/2010/main" xmlns="" w="12700">
                 <a:pattFill prst="narHorz">
                   <a:fgClr>
                     <a:schemeClr val="tx1"/>
@@ -11574,7 +11686,7 @@
               </a14:hiddenLine>
             </a:ext>
             <a:ext uri="{AF507438-7753-43e0-B8FC-AC1667EBCBE1}">
-              <a14:hiddenEffects xmlns="" xmlns:a14="http://schemas.microsoft.com/office/drawing/2010/main">
+              <a14:hiddenEffects xmlns:a14="http://schemas.microsoft.com/office/drawing/2010/main" xmlns="">
                 <a:effectLst>
                   <a:outerShdw blurRad="63500" dist="38099" dir="2700000" algn="ctr" rotWithShape="0">
                     <a:schemeClr val="bg2">
@@ -13567,17 +13679,17 @@
           <a:effectLst/>
           <a:extLst>
             <a:ext uri="{FAA26D3D-D897-4be2-8F04-BA451C77F1D7}">
-              <ma14:placeholderFlag xmlns="" xmlns:ma14="http://schemas.microsoft.com/office/mac/drawingml/2011/main" val="1"/>
+              <ma14:placeholderFlag xmlns:ma14="http://schemas.microsoft.com/office/mac/drawingml/2011/main" xmlns="" val="1"/>
             </a:ext>
             <a:ext uri="{909E8E84-426E-40dd-AFC4-6F175D3DCCD1}">
-              <a14:hiddenFill xmlns="" xmlns:a14="http://schemas.microsoft.com/office/drawing/2010/main">
+              <a14:hiddenFill xmlns:a14="http://schemas.microsoft.com/office/drawing/2010/main" xmlns="">
                 <a:solidFill>
                   <a:schemeClr val="bg1"/>
                 </a:solidFill>
               </a14:hiddenFill>
             </a:ext>
             <a:ext uri="{91240B29-F687-4f45-9708-019B960494DF}">
-              <a14:hiddenLine xmlns="" xmlns:a14="http://schemas.microsoft.com/office/drawing/2010/main" w="12700">
+              <a14:hiddenLine xmlns:a14="http://schemas.microsoft.com/office/drawing/2010/main" xmlns="" w="12700">
                 <a:pattFill prst="narHorz">
                   <a:fgClr>
                     <a:schemeClr val="tx1"/>
@@ -13592,7 +13704,7 @@
               </a14:hiddenLine>
             </a:ext>
             <a:ext uri="{AF507438-7753-43e0-B8FC-AC1667EBCBE1}">
-              <a14:hiddenEffects xmlns="" xmlns:a14="http://schemas.microsoft.com/office/drawing/2010/main">
+              <a14:hiddenEffects xmlns:a14="http://schemas.microsoft.com/office/drawing/2010/main" xmlns="">
                 <a:effectLst>
                   <a:outerShdw blurRad="63500" dist="38099" dir="2700000" algn="ctr" rotWithShape="0">
                     <a:schemeClr val="bg2">
@@ -13843,7 +13955,24 @@
                 <a:latin typeface="Courier New" panose="02070309020205020404" pitchFamily="49" charset="0"/>
                 <a:cs typeface="Courier New" panose="02070309020205020404" pitchFamily="49" charset="0"/>
               </a:rPr>
-              <a:t>    turn = 0; </a:t>
+              <a:t>    </a:t>
+            </a:r>
+            <a:r>
+              <a:rPr lang="en-GB" altLang="zh-CN" sz="1700" b="0" kern="0" dirty="0">
+                <a:solidFill>
+                  <a:srgbClr val="FF0000"/>
+                </a:solidFill>
+                <a:latin typeface="Courier New" panose="02070309020205020404" pitchFamily="49" charset="0"/>
+                <a:cs typeface="Courier New" panose="02070309020205020404" pitchFamily="49" charset="0"/>
+              </a:rPr>
+              <a:t>turn = 0</a:t>
+            </a:r>
+            <a:r>
+              <a:rPr lang="en-GB" altLang="zh-CN" sz="1700" b="0" kern="0" dirty="0">
+                <a:latin typeface="Courier New" panose="02070309020205020404" pitchFamily="49" charset="0"/>
+                <a:cs typeface="Courier New" panose="02070309020205020404" pitchFamily="49" charset="0"/>
+              </a:rPr>
+              <a:t>; </a:t>
             </a:r>
           </a:p>
           <a:p>
@@ -13931,17 +14060,17 @@
           <a:effectLst/>
           <a:extLst>
             <a:ext uri="{FAA26D3D-D897-4be2-8F04-BA451C77F1D7}">
-              <ma14:placeholderFlag xmlns="" xmlns:ma14="http://schemas.microsoft.com/office/mac/drawingml/2011/main" val="1"/>
+              <ma14:placeholderFlag xmlns:ma14="http://schemas.microsoft.com/office/mac/drawingml/2011/main" xmlns="" val="1"/>
             </a:ext>
             <a:ext uri="{909E8E84-426E-40dd-AFC4-6F175D3DCCD1}">
-              <a14:hiddenFill xmlns="" xmlns:a14="http://schemas.microsoft.com/office/drawing/2010/main">
+              <a14:hiddenFill xmlns:a14="http://schemas.microsoft.com/office/drawing/2010/main" xmlns="">
                 <a:solidFill>
                   <a:schemeClr val="bg1"/>
                 </a:solidFill>
               </a14:hiddenFill>
             </a:ext>
             <a:ext uri="{91240B29-F687-4f45-9708-019B960494DF}">
-              <a14:hiddenLine xmlns="" xmlns:a14="http://schemas.microsoft.com/office/drawing/2010/main" w="12700">
+              <a14:hiddenLine xmlns:a14="http://schemas.microsoft.com/office/drawing/2010/main" xmlns="" w="12700">
                 <a:pattFill prst="narHorz">
                   <a:fgClr>
                     <a:schemeClr val="tx1"/>
@@ -13956,7 +14085,7 @@
               </a14:hiddenLine>
             </a:ext>
             <a:ext uri="{AF507438-7753-43e0-B8FC-AC1667EBCBE1}">
-              <a14:hiddenEffects xmlns="" xmlns:a14="http://schemas.microsoft.com/office/drawing/2010/main">
+              <a14:hiddenEffects xmlns:a14="http://schemas.microsoft.com/office/drawing/2010/main" xmlns="">
                 <a:effectLst>
                   <a:outerShdw blurRad="63500" dist="38099" dir="2700000" algn="ctr" rotWithShape="0">
                     <a:schemeClr val="bg2">
@@ -14232,17 +14361,17 @@
           <a:effectLst/>
           <a:extLst>
             <a:ext uri="{FAA26D3D-D897-4be2-8F04-BA451C77F1D7}">
-              <ma14:placeholderFlag xmlns="" xmlns:ma14="http://schemas.microsoft.com/office/mac/drawingml/2011/main" val="1"/>
+              <ma14:placeholderFlag xmlns:ma14="http://schemas.microsoft.com/office/mac/drawingml/2011/main" xmlns="" val="1"/>
             </a:ext>
             <a:ext uri="{909E8E84-426E-40dd-AFC4-6F175D3DCCD1}">
-              <a14:hiddenFill xmlns="" xmlns:a14="http://schemas.microsoft.com/office/drawing/2010/main">
+              <a14:hiddenFill xmlns:a14="http://schemas.microsoft.com/office/drawing/2010/main" xmlns="">
                 <a:solidFill>
                   <a:schemeClr val="bg1"/>
                 </a:solidFill>
               </a14:hiddenFill>
             </a:ext>
             <a:ext uri="{91240B29-F687-4f45-9708-019B960494DF}">
-              <a14:hiddenLine xmlns="" xmlns:a14="http://schemas.microsoft.com/office/drawing/2010/main" w="12700">
+              <a14:hiddenLine xmlns:a14="http://schemas.microsoft.com/office/drawing/2010/main" xmlns="" w="12700">
                 <a:pattFill prst="narHorz">
                   <a:fgClr>
                     <a:schemeClr val="tx1"/>
@@ -14257,7 +14386,7 @@
               </a14:hiddenLine>
             </a:ext>
             <a:ext uri="{AF507438-7753-43e0-B8FC-AC1667EBCBE1}">
-              <a14:hiddenEffects xmlns="" xmlns:a14="http://schemas.microsoft.com/office/drawing/2010/main">
+              <a14:hiddenEffects xmlns:a14="http://schemas.microsoft.com/office/drawing/2010/main" xmlns="">
                 <a:effectLst>
                   <a:outerShdw blurRad="63500" dist="38099" dir="2700000" algn="ctr" rotWithShape="0">
                     <a:schemeClr val="bg2">
@@ -14508,19 +14637,25 @@
                 <a:latin typeface="Courier New" panose="02070309020205020404" pitchFamily="49" charset="0"/>
                 <a:cs typeface="Courier New" panose="02070309020205020404" pitchFamily="49" charset="0"/>
               </a:rPr>
-              <a:t>    turn </a:t>
-            </a:r>
-            <a:r>
-              <a:rPr lang="en-GB" altLang="zh-CN" sz="1700" b="0" kern="0">
+              <a:t>    </a:t>
+            </a:r>
+            <a:r>
+              <a:rPr lang="en-GB" altLang="zh-CN" sz="1700" b="0" kern="0" dirty="0">
+                <a:solidFill>
+                  <a:srgbClr val="FF0000"/>
+                </a:solidFill>
                 <a:latin typeface="Courier New" panose="02070309020205020404" pitchFamily="49" charset="0"/>
                 <a:cs typeface="Courier New" panose="02070309020205020404" pitchFamily="49" charset="0"/>
               </a:rPr>
-              <a:t>= 1; </a:t>
-            </a:r>
-            <a:endParaRPr lang="en-GB" altLang="zh-CN" sz="1700" b="0" kern="0" dirty="0">
-              <a:latin typeface="Courier New" panose="02070309020205020404" pitchFamily="49" charset="0"/>
-              <a:cs typeface="Courier New" panose="02070309020205020404" pitchFamily="49" charset="0"/>
-            </a:endParaRPr>
+              <a:t>turn = 1</a:t>
+            </a:r>
+            <a:r>
+              <a:rPr lang="en-GB" altLang="zh-CN" sz="1700" b="0" kern="0" dirty="0">
+                <a:latin typeface="Courier New" panose="02070309020205020404" pitchFamily="49" charset="0"/>
+                <a:cs typeface="Courier New" panose="02070309020205020404" pitchFamily="49" charset="0"/>
+              </a:rPr>
+              <a:t>; </a:t>
+            </a:r>
           </a:p>
           <a:p>
             <a:pPr marL="0" indent="0">
@@ -18776,17 +18911,17 @@
           <a:effectLst/>
           <a:extLst>
             <a:ext uri="{FAA26D3D-D897-4be2-8F04-BA451C77F1D7}">
-              <ma14:placeholderFlag xmlns="" xmlns:ma14="http://schemas.microsoft.com/office/mac/drawingml/2011/main" val="1"/>
+              <ma14:placeholderFlag xmlns:ma14="http://schemas.microsoft.com/office/mac/drawingml/2011/main" xmlns="" val="1"/>
             </a:ext>
             <a:ext uri="{909E8E84-426E-40dd-AFC4-6F175D3DCCD1}">
-              <a14:hiddenFill xmlns="" xmlns:a14="http://schemas.microsoft.com/office/drawing/2010/main">
+              <a14:hiddenFill xmlns:a14="http://schemas.microsoft.com/office/drawing/2010/main" xmlns="">
                 <a:solidFill>
                   <a:schemeClr val="bg1"/>
                 </a:solidFill>
               </a14:hiddenFill>
             </a:ext>
             <a:ext uri="{91240B29-F687-4f45-9708-019B960494DF}">
-              <a14:hiddenLine xmlns="" xmlns:a14="http://schemas.microsoft.com/office/drawing/2010/main" w="12700">
+              <a14:hiddenLine xmlns:a14="http://schemas.microsoft.com/office/drawing/2010/main" xmlns="" w="12700">
                 <a:pattFill prst="narHorz">
                   <a:fgClr>
                     <a:schemeClr val="tx1"/>
@@ -18801,7 +18936,7 @@
               </a14:hiddenLine>
             </a:ext>
             <a:ext uri="{AF507438-7753-43e0-B8FC-AC1667EBCBE1}">
-              <a14:hiddenEffects xmlns="" xmlns:a14="http://schemas.microsoft.com/office/drawing/2010/main">
+              <a14:hiddenEffects xmlns:a14="http://schemas.microsoft.com/office/drawing/2010/main" xmlns="">
                 <a:effectLst>
                   <a:outerShdw blurRad="63500" dist="38099" dir="2700000" algn="ctr" rotWithShape="0">
                     <a:schemeClr val="bg2">
@@ -19533,11 +19668,25 @@
               </a:tabLst>
             </a:pPr>
             <a:r>
+              <a:rPr lang="en-US" sz="2000" b="0" spc="40" dirty="0">
+                <a:latin typeface="Gill Sans" panose="020B0502020104020203"/>
+                <a:cs typeface="Arial MT"/>
+              </a:rPr>
+              <a:t>Set register r3 =</a:t>
+            </a:r>
+            <a:r>
+              <a:rPr sz="2000" b="0" spc="40" dirty="0">
+                <a:latin typeface="Gill Sans" panose="020B0502020104020203"/>
+                <a:cs typeface="Arial MT"/>
+              </a:rPr>
+              <a:t> </a:t>
+            </a:r>
+            <a:r>
               <a:rPr sz="2000" b="0" dirty="0">
                 <a:latin typeface="Gill Sans" panose="020B0502020104020203"/>
                 <a:cs typeface="Arial MT"/>
               </a:rPr>
-              <a:t>add</a:t>
+              <a:t>r1</a:t>
             </a:r>
             <a:r>
               <a:rPr sz="2000" b="0" spc="40" dirty="0">
@@ -19551,7 +19700,7 @@
                 <a:latin typeface="Gill Sans" panose="020B0502020104020203"/>
                 <a:cs typeface="Arial MT"/>
               </a:rPr>
-              <a:t>r1</a:t>
+              <a:t>+</a:t>
             </a:r>
             <a:r>
               <a:rPr sz="2000" b="0" spc="40" dirty="0">
@@ -19565,82 +19714,8 @@
                 <a:latin typeface="Gill Sans" panose="020B0502020104020203"/>
                 <a:cs typeface="Arial MT"/>
               </a:rPr>
-              <a:t>+</a:t>
-            </a:r>
-            <a:r>
-              <a:rPr sz="2000" b="0" spc="40" dirty="0">
-                <a:latin typeface="Gill Sans" panose="020B0502020104020203"/>
-                <a:cs typeface="Arial MT"/>
-              </a:rPr>
-              <a:t> </a:t>
-            </a:r>
-            <a:r>
-              <a:rPr sz="2000" b="0" dirty="0">
-                <a:latin typeface="Gill Sans" panose="020B0502020104020203"/>
-                <a:cs typeface="Arial MT"/>
-              </a:rPr>
-              <a:t>r2,</a:t>
-            </a:r>
-            <a:r>
-              <a:rPr sz="2000" b="0" spc="40" dirty="0">
-                <a:latin typeface="Gill Sans" panose="020B0502020104020203"/>
-                <a:cs typeface="Arial MT"/>
-              </a:rPr>
-              <a:t> </a:t>
-            </a:r>
-            <a:r>
-              <a:rPr sz="2000" b="0" dirty="0">
-                <a:latin typeface="Gill Sans" panose="020B0502020104020203"/>
-                <a:cs typeface="Arial MT"/>
-              </a:rPr>
-              <a:t>store</a:t>
-            </a:r>
-            <a:r>
-              <a:rPr sz="2000" b="0" spc="40" dirty="0">
-                <a:latin typeface="Gill Sans" panose="020B0502020104020203"/>
-                <a:cs typeface="Arial MT"/>
-              </a:rPr>
-              <a:t> </a:t>
-            </a:r>
-            <a:r>
-              <a:rPr sz="2000" b="0" dirty="0">
-                <a:latin typeface="Gill Sans" panose="020B0502020104020203"/>
-                <a:cs typeface="Arial MT"/>
-              </a:rPr>
-              <a:t>result</a:t>
-            </a:r>
-            <a:r>
-              <a:rPr sz="2000" b="0" spc="40" dirty="0">
-                <a:latin typeface="Gill Sans" panose="020B0502020104020203"/>
-                <a:cs typeface="Arial MT"/>
-              </a:rPr>
-              <a:t> </a:t>
-            </a:r>
-            <a:r>
-              <a:rPr sz="2000" b="0" dirty="0">
-                <a:latin typeface="Gill Sans" panose="020B0502020104020203"/>
-                <a:cs typeface="Arial MT"/>
-              </a:rPr>
-              <a:t>in</a:t>
-            </a:r>
-            <a:r>
-              <a:rPr sz="2000" b="0" spc="45" dirty="0">
-                <a:latin typeface="Gill Sans" panose="020B0502020104020203"/>
-                <a:cs typeface="Arial MT"/>
-              </a:rPr>
-              <a:t> </a:t>
-            </a:r>
-            <a:r>
-              <a:rPr sz="2000" b="0" spc="-25" dirty="0">
-                <a:latin typeface="Gill Sans" panose="020B0502020104020203"/>
-                <a:cs typeface="Arial MT"/>
-              </a:rPr>
-              <a:t>r3</a:t>
-            </a:r>
-            <a:endParaRPr sz="2000" b="0" dirty="0">
-              <a:latin typeface="Gill Sans" panose="020B0502020104020203"/>
-              <a:cs typeface="Arial MT"/>
-            </a:endParaRPr>
+              <a:t>r2</a:t>
+            </a:r>
           </a:p>
           <a:p>
             <a:pPr marL="928369" lvl="1" indent="-280670">
@@ -19874,24 +19949,73 @@
               <a:t> </a:t>
             </a:r>
             <a:r>
+              <a:rPr lang="en-US" sz="2000" b="0" spc="-15" dirty="0">
+                <a:latin typeface="Gill Sans" panose="020B0502020104020203"/>
+                <a:cs typeface="Arial MT"/>
+              </a:rPr>
+              <a:t>t1’s assembly </a:t>
+            </a:r>
+            <a:r>
+              <a:rPr sz="2000" b="0" spc="-10" dirty="0">
+                <a:latin typeface="Gill Sans" panose="020B0502020104020203"/>
+                <a:cs typeface="Arial MT"/>
+              </a:rPr>
+              <a:t>instructions</a:t>
+            </a:r>
+            <a:r>
+              <a:rPr sz="2000" b="0" spc="-110" dirty="0">
+                <a:latin typeface="Gill Sans" panose="020B0502020104020203"/>
+                <a:cs typeface="Arial MT"/>
+              </a:rPr>
+              <a:t> </a:t>
+            </a:r>
+            <a:r>
               <a:rPr sz="2000" b="0" dirty="0">
                 <a:latin typeface="Gill Sans" panose="020B0502020104020203"/>
                 <a:cs typeface="Arial MT"/>
               </a:rPr>
-              <a:t>machine</a:t>
+              <a:t>A</a:t>
+            </a:r>
+            <a:r>
+              <a:rPr sz="2000" b="0" spc="-110" dirty="0">
+                <a:latin typeface="Gill Sans" panose="020B0502020104020203"/>
+                <a:cs typeface="Arial MT"/>
+              </a:rPr>
+              <a:t> </a:t>
+            </a:r>
+            <a:r>
+              <a:rPr sz="2000" b="0" dirty="0">
+                <a:latin typeface="Gill Sans" panose="020B0502020104020203"/>
+                <a:cs typeface="Arial MT"/>
+              </a:rPr>
+              <a:t>and</a:t>
+            </a:r>
+            <a:r>
+              <a:rPr sz="2000" b="0" spc="-15" dirty="0">
+                <a:latin typeface="Gill Sans" panose="020B0502020104020203"/>
+                <a:cs typeface="Arial MT"/>
+              </a:rPr>
+              <a:t> </a:t>
+            </a:r>
+            <a:r>
+              <a:rPr sz="2000" b="0" dirty="0">
+                <a:latin typeface="Gill Sans" panose="020B0502020104020203"/>
+                <a:cs typeface="Arial MT"/>
+              </a:rPr>
+              <a:t>B</a:t>
+            </a:r>
+            <a:r>
+              <a:rPr lang="en-GB" sz="2000" b="0" dirty="0">
+                <a:latin typeface="Gill Sans" panose="020B0502020104020203"/>
+                <a:cs typeface="Arial MT"/>
+              </a:rPr>
+              <a:t>; and then</a:t>
             </a:r>
             <a:r>
               <a:rPr sz="2000" b="0" spc="-10" dirty="0">
                 <a:latin typeface="Gill Sans" panose="020B0502020104020203"/>
                 <a:cs typeface="Arial MT"/>
               </a:rPr>
-              <a:t> instructions</a:t>
-            </a:r>
-            <a:r>
-              <a:rPr sz="2000" b="0" spc="-110" dirty="0">
-                <a:latin typeface="Gill Sans" panose="020B0502020104020203"/>
-                <a:cs typeface="Arial MT"/>
-              </a:rPr>
               <a:t> </a:t>
             </a:r>
             <a:r>
@@ -19899,10 +20023,10 @@
                 <a:latin typeface="Gill Sans" panose="020B0502020104020203"/>
                 <a:cs typeface="Arial MT"/>
               </a:rPr>
-              <a:t>A</a:t>
-            </a:r>
-            <a:r>
-              <a:rPr sz="2000" b="0" spc="-110" dirty="0">
+              <a:t>t2</a:t>
+            </a:r>
+            <a:r>
+              <a:rPr sz="2000" b="0" spc="-15" dirty="0">
                 <a:latin typeface="Gill Sans" panose="020B0502020104020203"/>
                 <a:cs typeface="Arial MT"/>
               </a:rPr>
@@ -19913,31 +20037,31 @@
                 <a:latin typeface="Gill Sans" panose="020B0502020104020203"/>
                 <a:cs typeface="Arial MT"/>
               </a:rPr>
-              <a:t>and</a:t>
-            </a:r>
-            <a:r>
-              <a:rPr sz="2000" b="0" spc="-15" dirty="0">
+              <a:t>runs</a:t>
+            </a:r>
+            <a:r>
+              <a:rPr sz="2000" b="0" spc="-10" dirty="0">
                 <a:latin typeface="Gill Sans" panose="020B0502020104020203"/>
                 <a:cs typeface="Arial MT"/>
               </a:rPr>
               <a:t> </a:t>
             </a:r>
             <a:r>
+              <a:rPr sz="2000" b="0" spc="-25" dirty="0">
+                <a:latin typeface="Gill Sans" panose="020B0502020104020203"/>
+                <a:cs typeface="Arial MT"/>
+              </a:rPr>
+              <a:t>to </a:t>
+            </a:r>
+            <a:r>
               <a:rPr sz="2000" b="0" dirty="0">
                 <a:latin typeface="Gill Sans" panose="020B0502020104020203"/>
                 <a:cs typeface="Arial MT"/>
               </a:rPr>
-              <a:t>B</a:t>
-            </a:r>
-            <a:r>
-              <a:rPr lang="en-GB" sz="2000" b="0" dirty="0">
-                <a:latin typeface="Gill Sans" panose="020B0502020104020203"/>
-                <a:cs typeface="Arial MT"/>
-              </a:rPr>
-              <a:t>; then</a:t>
-            </a:r>
-            <a:r>
-              <a:rPr sz="2000" b="0" spc="-10" dirty="0">
+              <a:t>completion</a:t>
+            </a:r>
+            <a:r>
+              <a:rPr sz="2000" b="0" spc="-25" dirty="0">
                 <a:latin typeface="Gill Sans" panose="020B0502020104020203"/>
                 <a:cs typeface="Arial MT"/>
               </a:rPr>
@@ -19948,10 +20072,10 @@
                 <a:latin typeface="Gill Sans" panose="020B0502020104020203"/>
                 <a:cs typeface="Arial MT"/>
               </a:rPr>
-              <a:t>t2</a:t>
-            </a:r>
-            <a:r>
-              <a:rPr sz="2000" b="0" spc="-15" dirty="0">
+              <a:t>before</a:t>
+            </a:r>
+            <a:r>
+              <a:rPr sz="2000" b="0" spc="-25" dirty="0">
                 <a:latin typeface="Gill Sans" panose="020B0502020104020203"/>
                 <a:cs typeface="Arial MT"/>
               </a:rPr>
@@ -19962,112 +20086,56 @@
                 <a:latin typeface="Gill Sans" panose="020B0502020104020203"/>
                 <a:cs typeface="Arial MT"/>
               </a:rPr>
-              <a:t>runs</a:t>
-            </a:r>
-            <a:r>
-              <a:rPr sz="2000" b="0" spc="-10" dirty="0">
+              <a:t>switching</a:t>
+            </a:r>
+            <a:r>
+              <a:rPr sz="2000" b="0" spc="-20" dirty="0">
                 <a:latin typeface="Gill Sans" panose="020B0502020104020203"/>
                 <a:cs typeface="Arial MT"/>
               </a:rPr>
               <a:t> </a:t>
             </a:r>
             <a:r>
+              <a:rPr sz="2000" b="0" dirty="0">
+                <a:latin typeface="Gill Sans" panose="020B0502020104020203"/>
+                <a:cs typeface="Arial MT"/>
+              </a:rPr>
+              <a:t>back</a:t>
+            </a:r>
+            <a:r>
               <a:rPr sz="2000" b="0" spc="-25" dirty="0">
                 <a:latin typeface="Gill Sans" panose="020B0502020104020203"/>
                 <a:cs typeface="Arial MT"/>
               </a:rPr>
-              <a:t>to </a:t>
-            </a:r>
-            <a:r>
-              <a:rPr sz="2000" b="0" dirty="0">
-                <a:latin typeface="Gill Sans" panose="020B0502020104020203"/>
-                <a:cs typeface="Arial MT"/>
-              </a:rPr>
-              <a:t>completion</a:t>
-            </a:r>
-            <a:r>
-              <a:rPr sz="2000" b="0" spc="-25" dirty="0">
-                <a:latin typeface="Gill Sans" panose="020B0502020104020203"/>
-                <a:cs typeface="Arial MT"/>
-              </a:rPr>
               <a:t> </a:t>
             </a:r>
             <a:r>
-              <a:rPr sz="2000" b="0" dirty="0">
-                <a:latin typeface="Gill Sans" panose="020B0502020104020203"/>
-                <a:cs typeface="Arial MT"/>
-              </a:rPr>
-              <a:t>before</a:t>
-            </a:r>
-            <a:r>
-              <a:rPr sz="2000" b="0" spc="-25" dirty="0">
+              <a:rPr sz="2000" b="0">
+                <a:latin typeface="Gill Sans" panose="020B0502020104020203"/>
+                <a:cs typeface="Arial MT"/>
+              </a:rPr>
+              <a:t>to</a:t>
+            </a:r>
+            <a:r>
+              <a:rPr sz="2000" b="0" spc="-20">
                 <a:latin typeface="Gill Sans" panose="020B0502020104020203"/>
                 <a:cs typeface="Arial MT"/>
               </a:rPr>
               <a:t> </a:t>
             </a:r>
             <a:r>
-              <a:rPr sz="2000" b="0" dirty="0">
-                <a:latin typeface="Gill Sans" panose="020B0502020104020203"/>
-                <a:cs typeface="Arial MT"/>
-              </a:rPr>
-              <a:t>switching</a:t>
-            </a:r>
-            <a:r>
-              <a:rPr sz="2000" b="0" spc="-20" dirty="0">
-                <a:latin typeface="Gill Sans" panose="020B0502020104020203"/>
-                <a:cs typeface="Arial MT"/>
-              </a:rPr>
-              <a:t> </a:t>
-            </a:r>
-            <a:r>
-              <a:rPr sz="2000" b="0" dirty="0">
-                <a:latin typeface="Gill Sans" panose="020B0502020104020203"/>
-                <a:cs typeface="Arial MT"/>
-              </a:rPr>
-              <a:t>back</a:t>
-            </a:r>
-            <a:r>
-              <a:rPr sz="2000" b="0" spc="-25" dirty="0">
-                <a:latin typeface="Gill Sans" panose="020B0502020104020203"/>
-                <a:cs typeface="Arial MT"/>
-              </a:rPr>
-              <a:t> </a:t>
-            </a:r>
-            <a:r>
-              <a:rPr sz="2000" b="0" dirty="0">
-                <a:latin typeface="Gill Sans" panose="020B0502020104020203"/>
-                <a:cs typeface="Arial MT"/>
-              </a:rPr>
-              <a:t>to</a:t>
-            </a:r>
-            <a:r>
-              <a:rPr sz="2000" b="0" spc="-20" dirty="0">
-                <a:latin typeface="Gill Sans" panose="020B0502020104020203"/>
-                <a:cs typeface="Arial MT"/>
-              </a:rPr>
-              <a:t> </a:t>
-            </a:r>
-            <a:r>
-              <a:rPr sz="2000" b="0" dirty="0">
-                <a:latin typeface="Gill Sans" panose="020B0502020104020203"/>
-                <a:cs typeface="Arial MT"/>
-              </a:rPr>
-              <a:t>t1,</a:t>
-            </a:r>
-            <a:r>
-              <a:rPr sz="2000" b="0" spc="-25" dirty="0">
-                <a:latin typeface="Gill Sans" panose="020B0502020104020203"/>
-                <a:cs typeface="Arial MT"/>
-              </a:rPr>
-              <a:t> </a:t>
-            </a:r>
-            <a:r>
-              <a:rPr sz="2000" b="0" spc="-10" dirty="0">
-                <a:latin typeface="Gill Sans" panose="020B0502020104020203"/>
-                <a:cs typeface="Arial MT"/>
-              </a:rPr>
-              <a:t>then:</a:t>
+              <a:rPr sz="2000" b="0">
+                <a:latin typeface="Gill Sans" panose="020B0502020104020203"/>
+                <a:cs typeface="Arial MT"/>
+              </a:rPr>
+              <a:t>t1</a:t>
+            </a:r>
+            <a:r>
+              <a:rPr sz="2000" b="0" spc="-10">
+                <a:latin typeface="Gill Sans" panose="020B0502020104020203"/>
+                <a:cs typeface="Arial MT"/>
+              </a:rPr>
+              <a:t>:</a:t>
             </a:r>
             <a:endParaRPr sz="2000" b="0" dirty="0">
               <a:latin typeface="Gill Sans" panose="020B0502020104020203"/>
@@ -21738,17 +21806,17 @@
           <a:effectLst/>
           <a:extLst>
             <a:ext uri="{FAA26D3D-D897-4be2-8F04-BA451C77F1D7}">
-              <ma14:placeholderFlag xmlns="" xmlns:ma14="http://schemas.microsoft.com/office/mac/drawingml/2011/main" val="1"/>
+              <ma14:placeholderFlag xmlns:ma14="http://schemas.microsoft.com/office/mac/drawingml/2011/main" xmlns="" val="1"/>
             </a:ext>
             <a:ext uri="{909E8E84-426E-40dd-AFC4-6F175D3DCCD1}">
-              <a14:hiddenFill xmlns="" xmlns:a14="http://schemas.microsoft.com/office/drawing/2010/main">
+              <a14:hiddenFill xmlns:a14="http://schemas.microsoft.com/office/drawing/2010/main" xmlns="">
                 <a:solidFill>
                   <a:schemeClr val="bg1"/>
                 </a:solidFill>
               </a14:hiddenFill>
             </a:ext>
             <a:ext uri="{91240B29-F687-4f45-9708-019B960494DF}">
-              <a14:hiddenLine xmlns="" xmlns:a14="http://schemas.microsoft.com/office/drawing/2010/main" w="12700">
+              <a14:hiddenLine xmlns:a14="http://schemas.microsoft.com/office/drawing/2010/main" xmlns="" w="12700">
                 <a:pattFill prst="narHorz">
                   <a:fgClr>
                     <a:schemeClr val="tx1"/>
@@ -21763,7 +21831,7 @@
               </a14:hiddenLine>
             </a:ext>
             <a:ext uri="{AF507438-7753-43e0-B8FC-AC1667EBCBE1}">
-              <a14:hiddenEffects xmlns="" xmlns:a14="http://schemas.microsoft.com/office/drawing/2010/main">
+              <a14:hiddenEffects xmlns:a14="http://schemas.microsoft.com/office/drawing/2010/main" xmlns="">
                 <a:effectLst>
                   <a:outerShdw blurRad="63500" dist="38099" dir="2700000" algn="ctr" rotWithShape="0">
                     <a:schemeClr val="bg2">
@@ -23996,17 +24064,17 @@
           <a:effectLst/>
           <a:extLst>
             <a:ext uri="{FAA26D3D-D897-4be2-8F04-BA451C77F1D7}">
-              <ma14:placeholderFlag xmlns="" xmlns:ma14="http://schemas.microsoft.com/office/mac/drawingml/2011/main" val="1"/>
+              <ma14:placeholderFlag xmlns:ma14="http://schemas.microsoft.com/office/mac/drawingml/2011/main" xmlns="" val="1"/>
             </a:ext>
             <a:ext uri="{909E8E84-426E-40dd-AFC4-6F175D3DCCD1}">
-              <a14:hiddenFill xmlns="" xmlns:a14="http://schemas.microsoft.com/office/drawing/2010/main">
+              <a14:hiddenFill xmlns:a14="http://schemas.microsoft.com/office/drawing/2010/main" xmlns="">
                 <a:solidFill>
                   <a:schemeClr val="bg1"/>
                 </a:solidFill>
               </a14:hiddenFill>
             </a:ext>
             <a:ext uri="{91240B29-F687-4f45-9708-019B960494DF}">
-              <a14:hiddenLine xmlns="" xmlns:a14="http://schemas.microsoft.com/office/drawing/2010/main" w="12700">
+              <a14:hiddenLine xmlns:a14="http://schemas.microsoft.com/office/drawing/2010/main" xmlns="" w="12700">
                 <a:pattFill prst="narHorz">
                   <a:fgClr>
                     <a:schemeClr val="tx1"/>
@@ -24021,7 +24089,7 @@
               </a14:hiddenLine>
             </a:ext>
             <a:ext uri="{AF507438-7753-43e0-B8FC-AC1667EBCBE1}">
-              <a14:hiddenEffects xmlns="" xmlns:a14="http://schemas.microsoft.com/office/drawing/2010/main">
+              <a14:hiddenEffects xmlns:a14="http://schemas.microsoft.com/office/drawing/2010/main" xmlns="">
                 <a:effectLst>
                   <a:outerShdw blurRad="63500" dist="38099" dir="2700000" algn="ctr" rotWithShape="0">
                     <a:schemeClr val="bg2">
@@ -24266,17 +24334,17 @@
           <a:effectLst/>
           <a:extLst>
             <a:ext uri="{FAA26D3D-D897-4be2-8F04-BA451C77F1D7}">
-              <ma14:placeholderFlag xmlns="" xmlns:ma14="http://schemas.microsoft.com/office/mac/drawingml/2011/main" val="1"/>
+              <ma14:placeholderFlag xmlns:ma14="http://schemas.microsoft.com/office/mac/drawingml/2011/main" xmlns="" val="1"/>
             </a:ext>
             <a:ext uri="{909E8E84-426E-40dd-AFC4-6F175D3DCCD1}">
-              <a14:hiddenFill xmlns="" xmlns:a14="http://schemas.microsoft.com/office/drawing/2010/main">
+              <a14:hiddenFill xmlns:a14="http://schemas.microsoft.com/office/drawing/2010/main" xmlns="">
                 <a:solidFill>
                   <a:schemeClr val="bg1"/>
                 </a:solidFill>
               </a14:hiddenFill>
             </a:ext>
             <a:ext uri="{91240B29-F687-4f45-9708-019B960494DF}">
-              <a14:hiddenLine xmlns="" xmlns:a14="http://schemas.microsoft.com/office/drawing/2010/main" w="12700">
+              <a14:hiddenLine xmlns:a14="http://schemas.microsoft.com/office/drawing/2010/main" xmlns="" w="12700">
                 <a:pattFill prst="narHorz">
                   <a:fgClr>
                     <a:schemeClr val="tx1"/>
@@ -24291,7 +24359,7 @@
               </a14:hiddenLine>
             </a:ext>
             <a:ext uri="{AF507438-7753-43e0-B8FC-AC1667EBCBE1}">
-              <a14:hiddenEffects xmlns="" xmlns:a14="http://schemas.microsoft.com/office/drawing/2010/main">
+              <a14:hiddenEffects xmlns:a14="http://schemas.microsoft.com/office/drawing/2010/main" xmlns="">
                 <a:effectLst>
                   <a:outerShdw blurRad="63500" dist="38099" dir="2700000" algn="ctr" rotWithShape="0">
                     <a:schemeClr val="bg2">
@@ -24536,17 +24604,17 @@
           <a:effectLst/>
           <a:extLst>
             <a:ext uri="{FAA26D3D-D897-4be2-8F04-BA451C77F1D7}">
-              <ma14:placeholderFlag xmlns="" xmlns:ma14="http://schemas.microsoft.com/office/mac/drawingml/2011/main" val="1"/>
+              <ma14:placeholderFlag xmlns:ma14="http://schemas.microsoft.com/office/mac/drawingml/2011/main" xmlns="" val="1"/>
             </a:ext>
             <a:ext uri="{909E8E84-426E-40dd-AFC4-6F175D3DCCD1}">
-              <a14:hiddenFill xmlns="" xmlns:a14="http://schemas.microsoft.com/office/drawing/2010/main">
+              <a14:hiddenFill xmlns:a14="http://schemas.microsoft.com/office/drawing/2010/main" xmlns="">
                 <a:solidFill>
                   <a:schemeClr val="bg1"/>
                 </a:solidFill>
               </a14:hiddenFill>
             </a:ext>
             <a:ext uri="{91240B29-F687-4f45-9708-019B960494DF}">
-              <a14:hiddenLine xmlns="" xmlns:a14="http://schemas.microsoft.com/office/drawing/2010/main" w="12700">
+              <a14:hiddenLine xmlns:a14="http://schemas.microsoft.com/office/drawing/2010/main" xmlns="" w="12700">
                 <a:pattFill prst="narHorz">
                   <a:fgClr>
                     <a:schemeClr val="tx1"/>
@@ -24561,7 +24629,7 @@
               </a14:hiddenLine>
             </a:ext>
             <a:ext uri="{AF507438-7753-43e0-B8FC-AC1667EBCBE1}">
-              <a14:hiddenEffects xmlns="" xmlns:a14="http://schemas.microsoft.com/office/drawing/2010/main">
+              <a14:hiddenEffects xmlns:a14="http://schemas.microsoft.com/office/drawing/2010/main" xmlns="">
                 <a:effectLst>
                   <a:outerShdw blurRad="63500" dist="38099" dir="2700000" algn="ctr" rotWithShape="0">
                     <a:schemeClr val="bg2">
@@ -28590,7 +28658,7 @@
         </p:spPr>
         <p:txBody>
           <a:bodyPr>
-            <a:normAutofit fontScale="92500" lnSpcReduction="10000"/>
+            <a:normAutofit/>
           </a:bodyPr>
           <a:lstStyle/>
           <a:p>
@@ -28602,15 +28670,8 @@
           <a:p>
             <a:r>
               <a:rPr lang="en-GB" dirty="0"/>
-              <a:t>Q1: What are the minimum, maximum, and all possible values of x after the two threads have completed execution?</a:t>
-            </a:r>
-          </a:p>
-          <a:p>
-            <a:r>
-              <a:rPr lang="en-GB" dirty="0"/>
-              <a:t>Q2: Suppose we protect statement ‘x = x+2’ in Thread B within a critical section using a mutex lock. What are all the minimum, maximum, and all possible final values of x? </a:t>
-            </a:r>
-            <a:endParaRPr lang="en-SE" dirty="0"/>
+              <a:t>Q: What are the minimum, maximum, and all possible values of x after the two threads have completed execution?</a:t>
+            </a:r>
           </a:p>
         </p:txBody>
       </p:sp>
@@ -28647,17 +28708,17 @@
           <a:effectLst/>
           <a:extLst>
             <a:ext uri="{FAA26D3D-D897-4be2-8F04-BA451C77F1D7}">
-              <ma14:placeholderFlag xmlns="" xmlns:ma14="http://schemas.microsoft.com/office/mac/drawingml/2011/main" val="1"/>
+              <ma14:placeholderFlag xmlns:ma14="http://schemas.microsoft.com/office/mac/drawingml/2011/main" xmlns="" val="1"/>
             </a:ext>
             <a:ext uri="{909E8E84-426E-40dd-AFC4-6F175D3DCCD1}">
-              <a14:hiddenFill xmlns="" xmlns:a14="http://schemas.microsoft.com/office/drawing/2010/main">
+              <a14:hiddenFill xmlns:a14="http://schemas.microsoft.com/office/drawing/2010/main" xmlns="">
                 <a:solidFill>
                   <a:schemeClr val="bg1"/>
                 </a:solidFill>
               </a14:hiddenFill>
             </a:ext>
             <a:ext uri="{91240B29-F687-4f45-9708-019B960494DF}">
-              <a14:hiddenLine xmlns="" xmlns:a14="http://schemas.microsoft.com/office/drawing/2010/main" w="12700">
+              <a14:hiddenLine xmlns:a14="http://schemas.microsoft.com/office/drawing/2010/main" xmlns="" w="12700">
                 <a:pattFill prst="narHorz">
                   <a:fgClr>
                     <a:schemeClr val="tx1"/>
@@ -28672,7 +28733,7 @@
               </a14:hiddenLine>
             </a:ext>
             <a:ext uri="{AF507438-7753-43e0-B8FC-AC1667EBCBE1}">
-              <a14:hiddenEffects xmlns="" xmlns:a14="http://schemas.microsoft.com/office/drawing/2010/main">
+              <a14:hiddenEffects xmlns:a14="http://schemas.microsoft.com/office/drawing/2010/main" xmlns="">
                 <a:effectLst>
                   <a:outerShdw blurRad="63500" dist="38099" dir="2700000" algn="ctr" rotWithShape="0">
                     <a:schemeClr val="bg2">
@@ -28961,17 +29022,17 @@
           <a:effectLst/>
           <a:extLst>
             <a:ext uri="{FAA26D3D-D897-4be2-8F04-BA451C77F1D7}">
-              <ma14:placeholderFlag xmlns="" xmlns:ma14="http://schemas.microsoft.com/office/mac/drawingml/2011/main" val="1"/>
+              <ma14:placeholderFlag xmlns:ma14="http://schemas.microsoft.com/office/mac/drawingml/2011/main" xmlns="" val="1"/>
             </a:ext>
             <a:ext uri="{909E8E84-426E-40dd-AFC4-6F175D3DCCD1}">
-              <a14:hiddenFill xmlns="" xmlns:a14="http://schemas.microsoft.com/office/drawing/2010/main">
+              <a14:hiddenFill xmlns:a14="http://schemas.microsoft.com/office/drawing/2010/main" xmlns="">
                 <a:solidFill>
                   <a:schemeClr val="bg1"/>
                 </a:solidFill>
               </a14:hiddenFill>
             </a:ext>
             <a:ext uri="{91240B29-F687-4f45-9708-019B960494DF}">
-              <a14:hiddenLine xmlns="" xmlns:a14="http://schemas.microsoft.com/office/drawing/2010/main" w="12700">
+              <a14:hiddenLine xmlns:a14="http://schemas.microsoft.com/office/drawing/2010/main" xmlns="" w="12700">
                 <a:pattFill prst="narHorz">
                   <a:fgClr>
                     <a:schemeClr val="tx1"/>
@@ -28986,7 +29047,7 @@
               </a14:hiddenLine>
             </a:ext>
             <a:ext uri="{AF507438-7753-43e0-B8FC-AC1667EBCBE1}">
-              <a14:hiddenEffects xmlns="" xmlns:a14="http://schemas.microsoft.com/office/drawing/2010/main">
+              <a14:hiddenEffects xmlns:a14="http://schemas.microsoft.com/office/drawing/2010/main" xmlns="">
                 <a:effectLst>
                   <a:outerShdw blurRad="63500" dist="38099" dir="2700000" algn="ctr" rotWithShape="0">
                     <a:schemeClr val="bg2">
@@ -29287,17 +29348,17 @@
           <a:effectLst/>
           <a:extLst>
             <a:ext uri="{FAA26D3D-D897-4be2-8F04-BA451C77F1D7}">
-              <ma14:placeholderFlag xmlns="" xmlns:ma14="http://schemas.microsoft.com/office/mac/drawingml/2011/main" val="1"/>
+              <ma14:placeholderFlag xmlns:ma14="http://schemas.microsoft.com/office/mac/drawingml/2011/main" xmlns="" val="1"/>
             </a:ext>
             <a:ext uri="{909E8E84-426E-40dd-AFC4-6F175D3DCCD1}">
-              <a14:hiddenFill xmlns="" xmlns:a14="http://schemas.microsoft.com/office/drawing/2010/main">
+              <a14:hiddenFill xmlns:a14="http://schemas.microsoft.com/office/drawing/2010/main" xmlns="">
                 <a:solidFill>
                   <a:schemeClr val="bg1"/>
                 </a:solidFill>
               </a14:hiddenFill>
             </a:ext>
             <a:ext uri="{91240B29-F687-4f45-9708-019B960494DF}">
-              <a14:hiddenLine xmlns="" xmlns:a14="http://schemas.microsoft.com/office/drawing/2010/main" w="12700">
+              <a14:hiddenLine xmlns:a14="http://schemas.microsoft.com/office/drawing/2010/main" xmlns="" w="12700">
                 <a:pattFill prst="narHorz">
                   <a:fgClr>
                     <a:schemeClr val="tx1"/>
@@ -29312,7 +29373,7 @@
               </a14:hiddenLine>
             </a:ext>
             <a:ext uri="{AF507438-7753-43e0-B8FC-AC1667EBCBE1}">
-              <a14:hiddenEffects xmlns="" xmlns:a14="http://schemas.microsoft.com/office/drawing/2010/main">
+              <a14:hiddenEffects xmlns:a14="http://schemas.microsoft.com/office/drawing/2010/main" xmlns="">
                 <a:effectLst>
                   <a:outerShdw blurRad="63500" dist="38099" dir="2700000" algn="ctr" rotWithShape="0">
                     <a:schemeClr val="bg2">
@@ -38725,7 +38786,7 @@
         </p:spPr>
         <p:txBody>
           <a:bodyPr>
-            <a:normAutofit fontScale="85000" lnSpcReduction="20000"/>
+            <a:normAutofit fontScale="77500" lnSpcReduction="20000"/>
           </a:bodyPr>
           <a:lstStyle/>
           <a:p>
@@ -38777,12 +38838,30 @@
                 <a:latin typeface="Gill Sans" panose="020B0502020104020203"/>
                 <a:ea typeface="ＭＳ Ｐゴシック" charset="0"/>
               </a:rPr>
-              <a:t>Since Line 2 of t1 “z=z+2”, and Line 8 of t2 “z=z+1” are not protected within a critical section, a thread switch may occur in the middle of each line, e.g., </a:t>
-            </a:r>
+              <a:t>Since Line 2 of t1 “z=z+2”, and Line 8 of t2 “z=z+1” are not protected within a critical section, a thread switch may occur in the middle of each line, </a:t>
+            </a:r>
+            <a:r>
+              <a:rPr lang="en-US" sz="2600" kern="1200" dirty="0">
+                <a:latin typeface="Gill Sans" panose="020B0502020104020203"/>
+                <a:ea typeface="ＭＳ Ｐゴシック" charset="0"/>
+              </a:rPr>
+              <a:t>and one of the updates to z may be lost:</a:t>
+            </a:r>
+            <a:endParaRPr lang="en-GB" sz="2600" kern="1200" dirty="0">
+              <a:latin typeface="Gill Sans" panose="020B0502020104020203"/>
+              <a:ea typeface="ＭＳ Ｐゴシック" charset="0"/>
+            </a:endParaRPr>
           </a:p>
           <a:p>
             <a:pPr lvl="1"/>
             <a:r>
+              <a:rPr lang="en-US" sz="2300" kern="1200" dirty="0">
+                <a:latin typeface="Gill Sans" panose="020B0502020104020203"/>
+                <a:ea typeface="ＭＳ Ｐゴシック" charset="0"/>
+              </a:rPr>
+              <a:t>t1’s update z=z+2 is lost: </a:t>
+            </a:r>
+            <a:r>
               <a:rPr lang="en-GB" sz="2300" kern="1200" dirty="0">
                 <a:latin typeface="Gill Sans" panose="020B0502020104020203"/>
                 <a:ea typeface="ＭＳ Ｐゴシック" charset="0"/>
@@ -38797,7 +38876,21 @@
                 <a:latin typeface="Gill Sans" panose="020B0502020104020203"/>
                 <a:ea typeface="ＭＳ Ｐゴシック" charset="0"/>
               </a:rPr>
-              <a:t>Or, t1 Line 2 reads z=0; before z is written back; switch to t2 Line 2, run t2 to the end; switch to t1 Line 2, write back z=0+2=2. </a:t>
+              <a:t>Or, </a:t>
+            </a:r>
+            <a:r>
+              <a:rPr lang="en-US" sz="2300" kern="1200" dirty="0">
+                <a:latin typeface="Gill Sans" panose="020B0502020104020203"/>
+                <a:ea typeface="ＭＳ Ｐゴシック" charset="0"/>
+              </a:rPr>
+              <a:t>t2’s update z=z+1 is lost: </a:t>
+            </a:r>
+            <a:r>
+              <a:rPr lang="en-GB" sz="2300" kern="1200" dirty="0">
+                <a:latin typeface="Gill Sans" panose="020B0502020104020203"/>
+                <a:ea typeface="ＭＳ Ｐゴシック" charset="0"/>
+              </a:rPr>
+              <a:t>t1 Line 2 reads z=0; before z is written back; switch to t2 Line 2, run t2 to the end; switch to t1 Line 2, write back z=0+2=2. </a:t>
             </a:r>
           </a:p>
         </p:txBody>
@@ -41123,13 +41216,13 @@
         </p:spPr>
         <p:txBody>
           <a:bodyPr>
-            <a:normAutofit fontScale="70000" lnSpcReduction="20000"/>
+            <a:normAutofit lnSpcReduction="10000"/>
           </a:bodyPr>
           <a:lstStyle/>
           <a:p>
             <a:r>
               <a:rPr lang="en-GB" dirty="0"/>
-              <a:t>ANS1: Possible values of x after the two threads have completed execution: 5,…15. Min: 5. Max: 15. </a:t>
+              <a:t>ANS: Possible values of x after the two threads have completed execution: 5,…15. Min: 5. Max: 15. </a:t>
             </a:r>
           </a:p>
           <a:p>
@@ -41143,27 +41236,9 @@
               <a:t>sneaking in </a:t>
             </a:r>
             <a:r>
-              <a:rPr lang="en-GB"/>
-              <a:t>between” </a:t>
-            </a:r>
-            <a:r>
               <a:rPr lang="en-GB" dirty="0"/>
-              <a:t>the load and store of an x=x+1 statement, and vice versa. Each x=x+1 statement can either do nothing (if erased by Thread T1) or increase x by 1. Each x=x+2 statement can either do nothing (if erased by Thread T0) or increase x by 2. Since there are 5 of each type, and since x starts at 0, x has min 5 and max (5*1)+(5*2)=15. Possible values are 5, 6, 7,…15, e.g., If three increments from Thread T0 and two increments from Thread T1 are applied, then x=(3×1)+(2×2)=7.</a:t>
-            </a:r>
-          </a:p>
-          <a:p>
-            <a:r>
-              <a:rPr lang="en-GB" dirty="0"/>
-              <a:t>ANS2: Possible final values of x are 5, 7, 9, 11, 13, or 15. Min: 5. Max: 15. </a:t>
-            </a:r>
-          </a:p>
-          <a:p>
-            <a:pPr lvl="1"/>
-            <a:r>
-              <a:rPr lang="en-GB" dirty="0"/>
-              <a:t>Since the x=x+2 statements are atomic, the x=x+1 statements can never be “erased” because the load and store phases of x=x+2 cannot be separated. Thus, our final value is at least 5 (from Thread T0) with from 0 to 5 successful updates of x=x+1. When one x=x+2 is not erased, x has value 5+2=7. When two x=x+2 is not erased, x has value 5+4=9, and so on. </a:t>
-            </a:r>
-            <a:endParaRPr lang="en-SE" dirty="0"/>
+              <a:t>between” the load and store of an x=x+1 statement, and vice versa. Each x=x+1 statement can either do nothing (if erased by Thread T1) or increase x by 1. Each x=x+2 statement can either do nothing (if erased by Thread T0) or increase x by 2. Since there are 5 of each type, and since x starts at 0, x has min 5 and max (5*1)+(5*2)=15. Possible values are 5, 6, 7,…15, e.g., If three increments from Thread T0 and two increments from Thread T1 are applied, then x=(3×1)+(2×2)=7.</a:t>
+            </a:r>
           </a:p>
         </p:txBody>
       </p:sp>
@@ -41200,17 +41275,17 @@
           <a:effectLst/>
           <a:extLst>
             <a:ext uri="{FAA26D3D-D897-4be2-8F04-BA451C77F1D7}">
-              <ma14:placeholderFlag xmlns="" xmlns:ma14="http://schemas.microsoft.com/office/mac/drawingml/2011/main" val="1"/>
+              <ma14:placeholderFlag xmlns:ma14="http://schemas.microsoft.com/office/mac/drawingml/2011/main" xmlns="" val="1"/>
             </a:ext>
             <a:ext uri="{909E8E84-426E-40dd-AFC4-6F175D3DCCD1}">
-              <a14:hiddenFill xmlns="" xmlns:a14="http://schemas.microsoft.com/office/drawing/2010/main">
+              <a14:hiddenFill xmlns:a14="http://schemas.microsoft.com/office/drawing/2010/main" xmlns="">
                 <a:solidFill>
                   <a:schemeClr val="bg1"/>
                 </a:solidFill>
               </a14:hiddenFill>
             </a:ext>
             <a:ext uri="{91240B29-F687-4f45-9708-019B960494DF}">
-              <a14:hiddenLine xmlns="" xmlns:a14="http://schemas.microsoft.com/office/drawing/2010/main" w="12700">
+              <a14:hiddenLine xmlns:a14="http://schemas.microsoft.com/office/drawing/2010/main" xmlns="" w="12700">
                 <a:pattFill prst="narHorz">
                   <a:fgClr>
                     <a:schemeClr val="tx1"/>
@@ -41225,7 +41300,7 @@
               </a14:hiddenLine>
             </a:ext>
             <a:ext uri="{AF507438-7753-43e0-B8FC-AC1667EBCBE1}">
-              <a14:hiddenEffects xmlns="" xmlns:a14="http://schemas.microsoft.com/office/drawing/2010/main">
+              <a14:hiddenEffects xmlns:a14="http://schemas.microsoft.com/office/drawing/2010/main" xmlns="">
                 <a:effectLst>
                   <a:outerShdw blurRad="63500" dist="38099" dir="2700000" algn="ctr" rotWithShape="0">
                     <a:schemeClr val="bg2">
@@ -41514,17 +41589,17 @@
           <a:effectLst/>
           <a:extLst>
             <a:ext uri="{FAA26D3D-D897-4be2-8F04-BA451C77F1D7}">
-              <ma14:placeholderFlag xmlns="" xmlns:ma14="http://schemas.microsoft.com/office/mac/drawingml/2011/main" val="1"/>
+              <ma14:placeholderFlag xmlns:ma14="http://schemas.microsoft.com/office/mac/drawingml/2011/main" xmlns="" val="1"/>
             </a:ext>
             <a:ext uri="{909E8E84-426E-40dd-AFC4-6F175D3DCCD1}">
-              <a14:hiddenFill xmlns="" xmlns:a14="http://schemas.microsoft.com/office/drawing/2010/main">
+              <a14:hiddenFill xmlns:a14="http://schemas.microsoft.com/office/drawing/2010/main" xmlns="">
                 <a:solidFill>
                   <a:schemeClr val="bg1"/>
                 </a:solidFill>
               </a14:hiddenFill>
             </a:ext>
             <a:ext uri="{91240B29-F687-4f45-9708-019B960494DF}">
-              <a14:hiddenLine xmlns="" xmlns:a14="http://schemas.microsoft.com/office/drawing/2010/main" w="12700">
+              <a14:hiddenLine xmlns:a14="http://schemas.microsoft.com/office/drawing/2010/main" xmlns="" w="12700">
                 <a:pattFill prst="narHorz">
                   <a:fgClr>
                     <a:schemeClr val="tx1"/>
@@ -41539,7 +41614,7 @@
               </a14:hiddenLine>
             </a:ext>
             <a:ext uri="{AF507438-7753-43e0-B8FC-AC1667EBCBE1}">
-              <a14:hiddenEffects xmlns="" xmlns:a14="http://schemas.microsoft.com/office/drawing/2010/main">
+              <a14:hiddenEffects xmlns:a14="http://schemas.microsoft.com/office/drawing/2010/main" xmlns="">
                 <a:effectLst>
                   <a:outerShdw blurRad="63500" dist="38099" dir="2700000" algn="ctr" rotWithShape="0">
                     <a:schemeClr val="bg2">
@@ -41840,17 +41915,17 @@
           <a:effectLst/>
           <a:extLst>
             <a:ext uri="{FAA26D3D-D897-4be2-8F04-BA451C77F1D7}">
-              <ma14:placeholderFlag xmlns="" xmlns:ma14="http://schemas.microsoft.com/office/mac/drawingml/2011/main" val="1"/>
+              <ma14:placeholderFlag xmlns:ma14="http://schemas.microsoft.com/office/mac/drawingml/2011/main" xmlns="" val="1"/>
             </a:ext>
             <a:ext uri="{909E8E84-426E-40dd-AFC4-6F175D3DCCD1}">
-              <a14:hiddenFill xmlns="" xmlns:a14="http://schemas.microsoft.com/office/drawing/2010/main">
+              <a14:hiddenFill xmlns:a14="http://schemas.microsoft.com/office/drawing/2010/main" xmlns="">
                 <a:solidFill>
                   <a:schemeClr val="bg1"/>
                 </a:solidFill>
               </a14:hiddenFill>
             </a:ext>
             <a:ext uri="{91240B29-F687-4f45-9708-019B960494DF}">
-              <a14:hiddenLine xmlns="" xmlns:a14="http://schemas.microsoft.com/office/drawing/2010/main" w="12700">
+              <a14:hiddenLine xmlns:a14="http://schemas.microsoft.com/office/drawing/2010/main" xmlns="" w="12700">
                 <a:pattFill prst="narHorz">
                   <a:fgClr>
                     <a:schemeClr val="tx1"/>
@@ -41865,7 +41940,7 @@
               </a14:hiddenLine>
             </a:ext>
             <a:ext uri="{AF507438-7753-43e0-B8FC-AC1667EBCBE1}">
-              <a14:hiddenEffects xmlns="" xmlns:a14="http://schemas.microsoft.com/office/drawing/2010/main">
+              <a14:hiddenEffects xmlns:a14="http://schemas.microsoft.com/office/drawing/2010/main" xmlns="">
                 <a:effectLst>
                   <a:outerShdw blurRad="63500" dist="38099" dir="2700000" algn="ctr" rotWithShape="0">
                     <a:schemeClr val="bg2">
@@ -42221,17 +42296,17 @@
           <a:effectLst/>
           <a:extLst>
             <a:ext uri="{FAA26D3D-D897-4be2-8F04-BA451C77F1D7}">
-              <ma14:placeholderFlag xmlns="" xmlns:ma14="http://schemas.microsoft.com/office/mac/drawingml/2011/main" val="1"/>
+              <ma14:placeholderFlag xmlns:ma14="http://schemas.microsoft.com/office/mac/drawingml/2011/main" xmlns="" val="1"/>
             </a:ext>
             <a:ext uri="{909E8E84-426E-40dd-AFC4-6F175D3DCCD1}">
-              <a14:hiddenFill xmlns="" xmlns:a14="http://schemas.microsoft.com/office/drawing/2010/main">
+              <a14:hiddenFill xmlns:a14="http://schemas.microsoft.com/office/drawing/2010/main" xmlns="">
                 <a:solidFill>
                   <a:schemeClr val="bg1"/>
                 </a:solidFill>
               </a14:hiddenFill>
             </a:ext>
             <a:ext uri="{91240B29-F687-4f45-9708-019B960494DF}">
-              <a14:hiddenLine xmlns="" xmlns:a14="http://schemas.microsoft.com/office/drawing/2010/main" w="12700">
+              <a14:hiddenLine xmlns:a14="http://schemas.microsoft.com/office/drawing/2010/main" xmlns="" w="12700">
                 <a:pattFill prst="narHorz">
                   <a:fgClr>
                     <a:schemeClr val="tx1"/>
@@ -42246,7 +42321,7 @@
               </a14:hiddenLine>
             </a:ext>
             <a:ext uri="{AF507438-7753-43e0-B8FC-AC1667EBCBE1}">
-              <a14:hiddenEffects xmlns="" xmlns:a14="http://schemas.microsoft.com/office/drawing/2010/main">
+              <a14:hiddenEffects xmlns:a14="http://schemas.microsoft.com/office/drawing/2010/main" xmlns="">
                 <a:effectLst>
                   <a:outerShdw blurRad="63500" dist="38099" dir="2700000" algn="ctr" rotWithShape="0">
                     <a:schemeClr val="bg2">
@@ -42717,13 +42792,13 @@
           <a:p>
             <a:r>
               <a:rPr lang="en-GB" dirty="0"/>
-              <a:t>Min 50, max 130</a:t>
+              <a:t>Min 100 – 50 = 50, max 100 + 20 + 10 = 130</a:t>
             </a:r>
           </a:p>
           <a:p>
             <a:r>
               <a:rPr lang="en-GB" dirty="0"/>
-              <a:t>Since each thread may read the value of int D, then write them in arbitrary order, overwriting each other’s updates. Other possible results include 110, 120, 70…</a:t>
+              <a:t>Since each thread may read the value of int D, then write them in arbitrary order, overwriting each other’s updates. Other possible results include 100 + 10 = 10, 100 + 20 = 120, 100 + 20 – 50 = 70, and so on.</a:t>
             </a:r>
             <a:endParaRPr lang="en-SE" dirty="0"/>
           </a:p>
@@ -43244,17 +43319,17 @@
           <a:effectLst/>
           <a:extLst>
             <a:ext uri="{FAA26D3D-D897-4be2-8F04-BA451C77F1D7}">
-              <ma14:placeholderFlag xmlns="" xmlns:ma14="http://schemas.microsoft.com/office/mac/drawingml/2011/main" val="1"/>
+              <ma14:placeholderFlag xmlns:ma14="http://schemas.microsoft.com/office/mac/drawingml/2011/main" xmlns="" val="1"/>
             </a:ext>
             <a:ext uri="{909E8E84-426E-40dd-AFC4-6F175D3DCCD1}">
-              <a14:hiddenFill xmlns="" xmlns:a14="http://schemas.microsoft.com/office/drawing/2010/main">
+              <a14:hiddenFill xmlns:a14="http://schemas.microsoft.com/office/drawing/2010/main" xmlns="">
                 <a:solidFill>
                   <a:schemeClr val="bg1"/>
                 </a:solidFill>
               </a14:hiddenFill>
             </a:ext>
             <a:ext uri="{91240B29-F687-4f45-9708-019B960494DF}">
-              <a14:hiddenLine xmlns="" xmlns:a14="http://schemas.microsoft.com/office/drawing/2010/main" w="12700">
+              <a14:hiddenLine xmlns:a14="http://schemas.microsoft.com/office/drawing/2010/main" xmlns="" w="12700">
                 <a:pattFill prst="narHorz">
                   <a:fgClr>
                     <a:schemeClr val="tx1"/>
@@ -43269,7 +43344,7 @@
               </a14:hiddenLine>
             </a:ext>
             <a:ext uri="{AF507438-7753-43e0-B8FC-AC1667EBCBE1}">
-              <a14:hiddenEffects xmlns="" xmlns:a14="http://schemas.microsoft.com/office/drawing/2010/main">
+              <a14:hiddenEffects xmlns:a14="http://schemas.microsoft.com/office/drawing/2010/main" xmlns="">
                 <a:effectLst>
                   <a:outerShdw blurRad="63500" dist="38099" dir="2700000" algn="ctr" rotWithShape="0">
                     <a:schemeClr val="bg2">
@@ -43596,17 +43671,17 @@
           <a:effectLst/>
           <a:extLst>
             <a:ext uri="{FAA26D3D-D897-4be2-8F04-BA451C77F1D7}">
-              <ma14:placeholderFlag xmlns="" xmlns:ma14="http://schemas.microsoft.com/office/mac/drawingml/2011/main" val="1"/>
+              <ma14:placeholderFlag xmlns:ma14="http://schemas.microsoft.com/office/mac/drawingml/2011/main" xmlns="" val="1"/>
             </a:ext>
             <a:ext uri="{909E8E84-426E-40dd-AFC4-6F175D3DCCD1}">
-              <a14:hiddenFill xmlns="" xmlns:a14="http://schemas.microsoft.com/office/drawing/2010/main">
+              <a14:hiddenFill xmlns:a14="http://schemas.microsoft.com/office/drawing/2010/main" xmlns="">
                 <a:solidFill>
                   <a:schemeClr val="bg1"/>
                 </a:solidFill>
               </a14:hiddenFill>
             </a:ext>
             <a:ext uri="{91240B29-F687-4f45-9708-019B960494DF}">
-              <a14:hiddenLine xmlns="" xmlns:a14="http://schemas.microsoft.com/office/drawing/2010/main" w="12700">
+              <a14:hiddenLine xmlns:a14="http://schemas.microsoft.com/office/drawing/2010/main" xmlns="" w="12700">
                 <a:pattFill prst="narHorz">
                   <a:fgClr>
                     <a:schemeClr val="tx1"/>
@@ -43621,7 +43696,7 @@
               </a14:hiddenLine>
             </a:ext>
             <a:ext uri="{AF507438-7753-43e0-B8FC-AC1667EBCBE1}">
-              <a14:hiddenEffects xmlns="" xmlns:a14="http://schemas.microsoft.com/office/drawing/2010/main">
+              <a14:hiddenEffects xmlns:a14="http://schemas.microsoft.com/office/drawing/2010/main" xmlns="">
                 <a:effectLst>
                   <a:outerShdw blurRad="63500" dist="38099" dir="2700000" algn="ctr" rotWithShape="0">
                     <a:schemeClr val="bg2">
@@ -43946,17 +44021,17 @@
           <a:effectLst/>
           <a:extLst>
             <a:ext uri="{FAA26D3D-D897-4be2-8F04-BA451C77F1D7}">
-              <ma14:placeholderFlag xmlns="" xmlns:ma14="http://schemas.microsoft.com/office/mac/drawingml/2011/main" val="1"/>
+              <ma14:placeholderFlag xmlns:ma14="http://schemas.microsoft.com/office/mac/drawingml/2011/main" xmlns="" val="1"/>
             </a:ext>
             <a:ext uri="{909E8E84-426E-40dd-AFC4-6F175D3DCCD1}">
-              <a14:hiddenFill xmlns="" xmlns:a14="http://schemas.microsoft.com/office/drawing/2010/main">
+              <a14:hiddenFill xmlns:a14="http://schemas.microsoft.com/office/drawing/2010/main" xmlns="">
                 <a:solidFill>
                   <a:schemeClr val="bg1"/>
                 </a:solidFill>
               </a14:hiddenFill>
             </a:ext>
             <a:ext uri="{91240B29-F687-4f45-9708-019B960494DF}">
-              <a14:hiddenLine xmlns="" xmlns:a14="http://schemas.microsoft.com/office/drawing/2010/main" w="12700">
+              <a14:hiddenLine xmlns:a14="http://schemas.microsoft.com/office/drawing/2010/main" xmlns="" w="12700">
                 <a:pattFill prst="narHorz">
                   <a:fgClr>
                     <a:schemeClr val="tx1"/>
@@ -43971,7 +44046,7 @@
               </a14:hiddenLine>
             </a:ext>
             <a:ext uri="{AF507438-7753-43e0-B8FC-AC1667EBCBE1}">
-              <a14:hiddenEffects xmlns="" xmlns:a14="http://schemas.microsoft.com/office/drawing/2010/main">
+              <a14:hiddenEffects xmlns:a14="http://schemas.microsoft.com/office/drawing/2010/main" xmlns="">
                 <a:effectLst>
                   <a:outerShdw blurRad="63500" dist="38099" dir="2700000" algn="ctr" rotWithShape="0">
                     <a:schemeClr val="bg2">
@@ -44334,17 +44409,17 @@
           <a:effectLst/>
           <a:extLst>
             <a:ext uri="{FAA26D3D-D897-4be2-8F04-BA451C77F1D7}">
-              <ma14:placeholderFlag xmlns="" xmlns:ma14="http://schemas.microsoft.com/office/mac/drawingml/2011/main" val="1"/>
+              <ma14:placeholderFlag xmlns:ma14="http://schemas.microsoft.com/office/mac/drawingml/2011/main" xmlns="" val="1"/>
             </a:ext>
             <a:ext uri="{909E8E84-426E-40dd-AFC4-6F175D3DCCD1}">
-              <a14:hiddenFill xmlns="" xmlns:a14="http://schemas.microsoft.com/office/drawing/2010/main">
+              <a14:hiddenFill xmlns:a14="http://schemas.microsoft.com/office/drawing/2010/main" xmlns="">
                 <a:solidFill>
                   <a:schemeClr val="bg1"/>
                 </a:solidFill>
               </a14:hiddenFill>
             </a:ext>
             <a:ext uri="{91240B29-F687-4f45-9708-019B960494DF}">
-              <a14:hiddenLine xmlns="" xmlns:a14="http://schemas.microsoft.com/office/drawing/2010/main" w="12700">
+              <a14:hiddenLine xmlns:a14="http://schemas.microsoft.com/office/drawing/2010/main" xmlns="" w="12700">
                 <a:pattFill prst="narHorz">
                   <a:fgClr>
                     <a:schemeClr val="tx1"/>
@@ -44359,7 +44434,7 @@
               </a14:hiddenLine>
             </a:ext>
             <a:ext uri="{AF507438-7753-43e0-B8FC-AC1667EBCBE1}">
-              <a14:hiddenEffects xmlns="" xmlns:a14="http://schemas.microsoft.com/office/drawing/2010/main">
+              <a14:hiddenEffects xmlns:a14="http://schemas.microsoft.com/office/drawing/2010/main" xmlns="">
                 <a:effectLst>
                   <a:outerShdw blurRad="63500" dist="38099" dir="2700000" algn="ctr" rotWithShape="0">
                     <a:schemeClr val="bg2">
@@ -44674,17 +44749,17 @@
           <a:effectLst/>
           <a:extLst>
             <a:ext uri="{FAA26D3D-D897-4be2-8F04-BA451C77F1D7}">
-              <ma14:placeholderFlag xmlns="" xmlns:ma14="http://schemas.microsoft.com/office/mac/drawingml/2011/main" val="1"/>
+              <ma14:placeholderFlag xmlns:ma14="http://schemas.microsoft.com/office/mac/drawingml/2011/main" xmlns="" val="1"/>
             </a:ext>
             <a:ext uri="{909E8E84-426E-40dd-AFC4-6F175D3DCCD1}">
-              <a14:hiddenFill xmlns="" xmlns:a14="http://schemas.microsoft.com/office/drawing/2010/main">
+              <a14:hiddenFill xmlns:a14="http://schemas.microsoft.com/office/drawing/2010/main" xmlns="">
                 <a:solidFill>
                   <a:schemeClr val="bg1"/>
                 </a:solidFill>
               </a14:hiddenFill>
             </a:ext>
             <a:ext uri="{91240B29-F687-4f45-9708-019B960494DF}">
-              <a14:hiddenLine xmlns="" xmlns:a14="http://schemas.microsoft.com/office/drawing/2010/main" w="12700">
+              <a14:hiddenLine xmlns:a14="http://schemas.microsoft.com/office/drawing/2010/main" xmlns="" w="12700">
                 <a:pattFill prst="narHorz">
                   <a:fgClr>
                     <a:schemeClr val="tx1"/>
@@ -44699,7 +44774,7 @@
               </a14:hiddenLine>
             </a:ext>
             <a:ext uri="{AF507438-7753-43e0-B8FC-AC1667EBCBE1}">
-              <a14:hiddenEffects xmlns="" xmlns:a14="http://schemas.microsoft.com/office/drawing/2010/main">
+              <a14:hiddenEffects xmlns:a14="http://schemas.microsoft.com/office/drawing/2010/main" xmlns="">
                 <a:effectLst>
                   <a:outerShdw blurRad="63500" dist="38099" dir="2700000" algn="ctr" rotWithShape="0">
                     <a:schemeClr val="bg2">
@@ -45023,17 +45098,17 @@
           <a:effectLst/>
           <a:extLst>
             <a:ext uri="{FAA26D3D-D897-4be2-8F04-BA451C77F1D7}">
-              <ma14:placeholderFlag xmlns="" xmlns:ma14="http://schemas.microsoft.com/office/mac/drawingml/2011/main" val="1"/>
+              <ma14:placeholderFlag xmlns:ma14="http://schemas.microsoft.com/office/mac/drawingml/2011/main" xmlns="" val="1"/>
             </a:ext>
             <a:ext uri="{909E8E84-426E-40dd-AFC4-6F175D3DCCD1}">
-              <a14:hiddenFill xmlns="" xmlns:a14="http://schemas.microsoft.com/office/drawing/2010/main">
+              <a14:hiddenFill xmlns:a14="http://schemas.microsoft.com/office/drawing/2010/main" xmlns="">
                 <a:solidFill>
                   <a:schemeClr val="bg1"/>
                 </a:solidFill>
               </a14:hiddenFill>
             </a:ext>
             <a:ext uri="{91240B29-F687-4f45-9708-019B960494DF}">
-              <a14:hiddenLine xmlns="" xmlns:a14="http://schemas.microsoft.com/office/drawing/2010/main" w="12700">
+              <a14:hiddenLine xmlns:a14="http://schemas.microsoft.com/office/drawing/2010/main" xmlns="" w="12700">
                 <a:pattFill prst="narHorz">
                   <a:fgClr>
                     <a:schemeClr val="tx1"/>
@@ -45048,7 +45123,7 @@
               </a14:hiddenLine>
             </a:ext>
             <a:ext uri="{AF507438-7753-43e0-B8FC-AC1667EBCBE1}">
-              <a14:hiddenEffects xmlns="" xmlns:a14="http://schemas.microsoft.com/office/drawing/2010/main">
+              <a14:hiddenEffects xmlns:a14="http://schemas.microsoft.com/office/drawing/2010/main" xmlns="">
                 <a:effectLst>
                   <a:outerShdw blurRad="63500" dist="38099" dir="2700000" algn="ctr" rotWithShape="0">
                     <a:schemeClr val="bg2">
@@ -46424,7 +46499,7 @@
         <a:effectLst/>
         <a:extLst>
           <a:ext uri="{AF507438-7753-43e0-B8FC-AC1667EBCBE1}">
-            <a14:hiddenEffects xmlns="" xmlns:a14="http://schemas.microsoft.com/office/drawing/2010/main">
+            <a14:hiddenEffects xmlns:a14="http://schemas.microsoft.com/office/drawing/2010/main" xmlns="">
               <a:effectLst>
                 <a:outerShdw dist="35921" dir="2700000" algn="ctr" rotWithShape="0">
                   <a:schemeClr val="bg2"/>
@@ -46497,7 +46572,7 @@
         <a:effectLst/>
         <a:extLst>
           <a:ext uri="{AF507438-7753-43e0-B8FC-AC1667EBCBE1}">
-            <a14:hiddenEffects xmlns="" xmlns:a14="http://schemas.microsoft.com/office/drawing/2010/main">
+            <a14:hiddenEffects xmlns:a14="http://schemas.microsoft.com/office/drawing/2010/main" xmlns="">
               <a:effectLst>
                 <a:outerShdw dist="35921" dir="2700000" algn="ctr" rotWithShape="0">
                   <a:schemeClr val="bg2"/>
